--- a/test-corpus/word-verification/sankey.pptx
+++ b/test-corpus/word-verification/sankey.pptx
@@ -144,8 +144,8 @@
         </p:nvSpPr>
         <p:spPr>
           <a:xfrm>
-            <a:off x="4469448" y="1327150"/>
-            <a:ext cx="3253105" cy="186512"/>
+            <a:off x="2952203" y="2213996"/>
+            <a:ext cx="2044778" cy="117234"/>
           </a:xfrm>
           <a:custGeom>
             <a:avLst/>
@@ -154,108 +154,108 @@
             <a:cxnLst/>
             <a:rect l="0" t="0" r="0" b="0"/>
             <a:pathLst>
-              <a:path w="2076450" h="119050">
+              <a:path w="2044778" h="117234">
                 <a:moveTo>
-                  <a:pt x="0" y="115207"/>
+                  <a:pt x="0" y="113450"/>
                 </a:moveTo>
                 <a:lnTo>
-                  <a:pt x="183007" y="113914"/>
-                </a:lnTo>
-                <a:lnTo>
-                  <a:pt x="344723" y="110257"/>
-                </a:lnTo>
-                <a:lnTo>
-                  <a:pt x="488189" y="104575"/>
-                </a:lnTo>
-                <a:lnTo>
-                  <a:pt x="616446" y="97206"/>
-                </a:lnTo>
-                <a:lnTo>
-                  <a:pt x="732537" y="88487"/>
-                </a:lnTo>
-                <a:lnTo>
-                  <a:pt x="839502" y="78755"/>
-                </a:lnTo>
-                <a:lnTo>
-                  <a:pt x="940384" y="68348"/>
-                </a:lnTo>
-                <a:lnTo>
-                  <a:pt x="1038225" y="57604"/>
-                </a:lnTo>
-                <a:lnTo>
-                  <a:pt x="1136066" y="46859"/>
-                </a:lnTo>
-                <a:lnTo>
-                  <a:pt x="1236948" y="36452"/>
-                </a:lnTo>
-                <a:lnTo>
-                  <a:pt x="1343913" y="26720"/>
-                </a:lnTo>
-                <a:lnTo>
-                  <a:pt x="1460004" y="18001"/>
-                </a:lnTo>
-                <a:lnTo>
-                  <a:pt x="1588261" y="10632"/>
-                </a:lnTo>
-                <a:lnTo>
-                  <a:pt x="1731727" y="4950"/>
-                </a:lnTo>
-                <a:lnTo>
-                  <a:pt x="1893443" y="1294"/>
-                </a:lnTo>
-                <a:lnTo>
-                  <a:pt x="2076450" y="0"/>
-                </a:lnTo>
-                <a:lnTo>
-                  <a:pt x="2076450" y="3843"/>
-                </a:lnTo>
-                <a:lnTo>
-                  <a:pt x="1893443" y="5136"/>
-                </a:lnTo>
-                <a:lnTo>
-                  <a:pt x="1731727" y="8793"/>
-                </a:lnTo>
-                <a:lnTo>
-                  <a:pt x="1588261" y="14475"/>
-                </a:lnTo>
-                <a:lnTo>
-                  <a:pt x="1460004" y="21844"/>
-                </a:lnTo>
-                <a:lnTo>
-                  <a:pt x="1343913" y="30563"/>
-                </a:lnTo>
-                <a:lnTo>
-                  <a:pt x="1236948" y="40295"/>
-                </a:lnTo>
-                <a:lnTo>
-                  <a:pt x="1136066" y="50702"/>
-                </a:lnTo>
-                <a:lnTo>
-                  <a:pt x="1038225" y="61446"/>
-                </a:lnTo>
-                <a:lnTo>
-                  <a:pt x="940384" y="72191"/>
-                </a:lnTo>
-                <a:lnTo>
-                  <a:pt x="839502" y="82598"/>
-                </a:lnTo>
-                <a:lnTo>
-                  <a:pt x="732537" y="92330"/>
-                </a:lnTo>
-                <a:lnTo>
-                  <a:pt x="616446" y="101049"/>
-                </a:lnTo>
-                <a:lnTo>
-                  <a:pt x="488189" y="108418"/>
-                </a:lnTo>
-                <a:lnTo>
-                  <a:pt x="344723" y="114100"/>
-                </a:lnTo>
-                <a:lnTo>
-                  <a:pt x="183007" y="117756"/>
-                </a:lnTo>
-                <a:lnTo>
-                  <a:pt x="0" y="119050"/>
+                  <a:pt x="180216" y="112176"/>
+                </a:lnTo>
+                <a:lnTo>
+                  <a:pt x="339465" y="108576"/>
+                </a:lnTo>
+                <a:lnTo>
+                  <a:pt x="480743" y="102981"/>
+                </a:lnTo>
+                <a:lnTo>
+                  <a:pt x="607044" y="95724"/>
+                </a:lnTo>
+                <a:lnTo>
+                  <a:pt x="721363" y="87137"/>
+                </a:lnTo>
+                <a:lnTo>
+                  <a:pt x="826697" y="77554"/>
+                </a:lnTo>
+                <a:lnTo>
+                  <a:pt x="926041" y="67306"/>
+                </a:lnTo>
+                <a:lnTo>
+                  <a:pt x="1022389" y="56725"/>
+                </a:lnTo>
+                <a:lnTo>
+                  <a:pt x="1118737" y="46145"/>
+                </a:lnTo>
+                <a:lnTo>
+                  <a:pt x="1218081" y="35897"/>
+                </a:lnTo>
+                <a:lnTo>
+                  <a:pt x="1323415" y="26313"/>
+                </a:lnTo>
+                <a:lnTo>
+                  <a:pt x="1437734" y="17727"/>
+                </a:lnTo>
+                <a:lnTo>
+                  <a:pt x="1564035" y="10470"/>
+                </a:lnTo>
+                <a:lnTo>
+                  <a:pt x="1705313" y="4875"/>
+                </a:lnTo>
+                <a:lnTo>
+                  <a:pt x="1864562" y="1274"/>
+                </a:lnTo>
+                <a:lnTo>
+                  <a:pt x="2044778" y="0"/>
+                </a:lnTo>
+                <a:lnTo>
+                  <a:pt x="2044778" y="3784"/>
+                </a:lnTo>
+                <a:lnTo>
+                  <a:pt x="1864562" y="5058"/>
+                </a:lnTo>
+                <a:lnTo>
+                  <a:pt x="1705313" y="8659"/>
+                </a:lnTo>
+                <a:lnTo>
+                  <a:pt x="1564035" y="14254"/>
+                </a:lnTo>
+                <a:lnTo>
+                  <a:pt x="1437734" y="21511"/>
+                </a:lnTo>
+                <a:lnTo>
+                  <a:pt x="1323415" y="30097"/>
+                </a:lnTo>
+                <a:lnTo>
+                  <a:pt x="1218081" y="39681"/>
+                </a:lnTo>
+                <a:lnTo>
+                  <a:pt x="1118737" y="49929"/>
+                </a:lnTo>
+                <a:lnTo>
+                  <a:pt x="1022389" y="60509"/>
+                </a:lnTo>
+                <a:lnTo>
+                  <a:pt x="926041" y="71090"/>
+                </a:lnTo>
+                <a:lnTo>
+                  <a:pt x="826697" y="81338"/>
+                </a:lnTo>
+                <a:lnTo>
+                  <a:pt x="721363" y="90921"/>
+                </a:lnTo>
+                <a:lnTo>
+                  <a:pt x="607044" y="99508"/>
+                </a:lnTo>
+                <a:lnTo>
+                  <a:pt x="480743" y="106765"/>
+                </a:lnTo>
+                <a:lnTo>
+                  <a:pt x="339465" y="112360"/>
+                </a:lnTo>
+                <a:lnTo>
+                  <a:pt x="180216" y="115960"/>
+                </a:lnTo>
+                <a:lnTo>
+                  <a:pt x="0" y="117234"/>
                 </a:lnTo>
                 <a:close/>
               </a:path>
@@ -266,7 +266,7 @@
               <a:alpha val="45000"/>
             </a:srgbClr>
           </a:solidFill>
-          <a:ln w="4974">
+          <a:ln w="3175">
             <a:solidFill>
               <a:srgbClr val="ED7D31"/>
             </a:solidFill>
@@ -281,8 +281,8 @@
         </p:nvSpPr>
         <p:spPr>
           <a:xfrm>
-            <a:off x="1007428" y="1507641"/>
-            <a:ext cx="3253105" cy="2553635"/>
+            <a:off x="776110" y="2327446"/>
+            <a:ext cx="2044777" cy="1605117"/>
           </a:xfrm>
           <a:custGeom>
             <a:avLst/>
@@ -291,108 +291,108 @@
             <a:cxnLst/>
             <a:rect l="0" t="0" r="0" b="0"/>
             <a:pathLst>
-              <a:path w="2076450" h="1629980">
+              <a:path w="2044777" h="1605117">
                 <a:moveTo>
-                  <a:pt x="0" y="827154"/>
+                  <a:pt x="0" y="814537"/>
                 </a:moveTo>
                 <a:lnTo>
-                  <a:pt x="183007" y="817864"/>
-                </a:lnTo>
-                <a:lnTo>
-                  <a:pt x="344723" y="791612"/>
-                </a:lnTo>
-                <a:lnTo>
-                  <a:pt x="488189" y="750820"/>
-                </a:lnTo>
-                <a:lnTo>
-                  <a:pt x="616446" y="697911"/>
-                </a:lnTo>
-                <a:lnTo>
-                  <a:pt x="732537" y="635309"/>
-                </a:lnTo>
-                <a:lnTo>
-                  <a:pt x="839502" y="565437"/>
-                </a:lnTo>
-                <a:lnTo>
-                  <a:pt x="940384" y="490719"/>
-                </a:lnTo>
-                <a:lnTo>
-                  <a:pt x="1038225" y="413577"/>
-                </a:lnTo>
-                <a:lnTo>
-                  <a:pt x="1136066" y="336435"/>
-                </a:lnTo>
-                <a:lnTo>
-                  <a:pt x="1236948" y="261717"/>
-                </a:lnTo>
-                <a:lnTo>
-                  <a:pt x="1343913" y="191845"/>
-                </a:lnTo>
-                <a:lnTo>
-                  <a:pt x="1460004" y="129243"/>
-                </a:lnTo>
-                <a:lnTo>
-                  <a:pt x="1588261" y="76334"/>
-                </a:lnTo>
-                <a:lnTo>
-                  <a:pt x="1731727" y="35542"/>
-                </a:lnTo>
-                <a:lnTo>
-                  <a:pt x="1893443" y="9290"/>
-                </a:lnTo>
-                <a:lnTo>
-                  <a:pt x="2076450" y="0"/>
-                </a:lnTo>
-                <a:lnTo>
-                  <a:pt x="2076450" y="802827"/>
-                </a:lnTo>
-                <a:lnTo>
-                  <a:pt x="1893443" y="812116"/>
-                </a:lnTo>
-                <a:lnTo>
-                  <a:pt x="1731727" y="838368"/>
-                </a:lnTo>
-                <a:lnTo>
-                  <a:pt x="1588261" y="879161"/>
-                </a:lnTo>
-                <a:lnTo>
-                  <a:pt x="1460004" y="932069"/>
-                </a:lnTo>
-                <a:lnTo>
-                  <a:pt x="1343913" y="994671"/>
-                </a:lnTo>
-                <a:lnTo>
-                  <a:pt x="1236948" y="1064543"/>
-                </a:lnTo>
-                <a:lnTo>
-                  <a:pt x="1136066" y="1139261"/>
-                </a:lnTo>
-                <a:lnTo>
-                  <a:pt x="1038225" y="1216403"/>
-                </a:lnTo>
-                <a:lnTo>
-                  <a:pt x="940384" y="1293545"/>
-                </a:lnTo>
-                <a:lnTo>
-                  <a:pt x="839502" y="1368263"/>
-                </a:lnTo>
-                <a:lnTo>
-                  <a:pt x="732537" y="1438135"/>
-                </a:lnTo>
-                <a:lnTo>
-                  <a:pt x="616446" y="1500737"/>
-                </a:lnTo>
-                <a:lnTo>
-                  <a:pt x="488189" y="1553646"/>
-                </a:lnTo>
-                <a:lnTo>
-                  <a:pt x="344723" y="1594438"/>
-                </a:lnTo>
-                <a:lnTo>
-                  <a:pt x="183007" y="1620690"/>
-                </a:lnTo>
-                <a:lnTo>
-                  <a:pt x="0" y="1629980"/>
+                  <a:pt x="180216" y="805389"/>
+                </a:lnTo>
+                <a:lnTo>
+                  <a:pt x="339465" y="779537"/>
+                </a:lnTo>
+                <a:lnTo>
+                  <a:pt x="480743" y="739367"/>
+                </a:lnTo>
+                <a:lnTo>
+                  <a:pt x="607043" y="687265"/>
+                </a:lnTo>
+                <a:lnTo>
+                  <a:pt x="721363" y="625618"/>
+                </a:lnTo>
+                <a:lnTo>
+                  <a:pt x="826697" y="556812"/>
+                </a:lnTo>
+                <a:lnTo>
+                  <a:pt x="926041" y="483234"/>
+                </a:lnTo>
+                <a:lnTo>
+                  <a:pt x="1022389" y="407269"/>
+                </a:lnTo>
+                <a:lnTo>
+                  <a:pt x="1118737" y="331303"/>
+                </a:lnTo>
+                <a:lnTo>
+                  <a:pt x="1218080" y="257725"/>
+                </a:lnTo>
+                <a:lnTo>
+                  <a:pt x="1323414" y="188919"/>
+                </a:lnTo>
+                <a:lnTo>
+                  <a:pt x="1437734" y="127272"/>
+                </a:lnTo>
+                <a:lnTo>
+                  <a:pt x="1564035" y="75170"/>
+                </a:lnTo>
+                <a:lnTo>
+                  <a:pt x="1705312" y="35000"/>
+                </a:lnTo>
+                <a:lnTo>
+                  <a:pt x="1864561" y="9148"/>
+                </a:lnTo>
+                <a:lnTo>
+                  <a:pt x="2044777" y="0"/>
+                </a:lnTo>
+                <a:lnTo>
+                  <a:pt x="2044777" y="790581"/>
+                </a:lnTo>
+                <a:lnTo>
+                  <a:pt x="1864561" y="799728"/>
+                </a:lnTo>
+                <a:lnTo>
+                  <a:pt x="1705312" y="825580"/>
+                </a:lnTo>
+                <a:lnTo>
+                  <a:pt x="1564035" y="865750"/>
+                </a:lnTo>
+                <a:lnTo>
+                  <a:pt x="1437734" y="917852"/>
+                </a:lnTo>
+                <a:lnTo>
+                  <a:pt x="1323414" y="979499"/>
+                </a:lnTo>
+                <a:lnTo>
+                  <a:pt x="1218080" y="1048305"/>
+                </a:lnTo>
+                <a:lnTo>
+                  <a:pt x="1118737" y="1121884"/>
+                </a:lnTo>
+                <a:lnTo>
+                  <a:pt x="1022389" y="1197849"/>
+                </a:lnTo>
+                <a:lnTo>
+                  <a:pt x="926041" y="1273814"/>
+                </a:lnTo>
+                <a:lnTo>
+                  <a:pt x="826697" y="1347393"/>
+                </a:lnTo>
+                <a:lnTo>
+                  <a:pt x="721363" y="1416199"/>
+                </a:lnTo>
+                <a:lnTo>
+                  <a:pt x="607043" y="1477846"/>
+                </a:lnTo>
+                <a:lnTo>
+                  <a:pt x="480743" y="1529947"/>
+                </a:lnTo>
+                <a:lnTo>
+                  <a:pt x="339465" y="1570117"/>
+                </a:lnTo>
+                <a:lnTo>
+                  <a:pt x="180216" y="1595969"/>
+                </a:lnTo>
+                <a:lnTo>
+                  <a:pt x="0" y="1605117"/>
                 </a:lnTo>
                 <a:close/>
               </a:path>
@@ -403,7 +403,7 @@
               <a:alpha val="45000"/>
             </a:srgbClr>
           </a:solidFill>
-          <a:ln w="4974">
+          <a:ln w="3175">
             <a:solidFill>
               <a:srgbClr val="4472C4"/>
             </a:solidFill>
@@ -418,8 +418,8 @@
         </p:nvSpPr>
         <p:spPr>
           <a:xfrm>
-            <a:off x="4469448" y="1513662"/>
-            <a:ext cx="3253105" cy="552206"/>
+            <a:off x="2952203" y="2331230"/>
+            <a:ext cx="2044778" cy="347096"/>
           </a:xfrm>
           <a:custGeom>
             <a:avLst/>
@@ -428,108 +428,108 @@
             <a:cxnLst/>
             <a:rect l="0" t="0" r="0" b="0"/>
             <a:pathLst>
-              <a:path w="2076450" h="352472">
+              <a:path w="2044778" h="347096">
                 <a:moveTo>
                   <a:pt x="0" y="0"/>
                 </a:moveTo>
                 <a:lnTo>
-                  <a:pt x="183007" y="2017"/>
-                </a:lnTo>
-                <a:lnTo>
-                  <a:pt x="344723" y="7716"/>
-                </a:lnTo>
-                <a:lnTo>
-                  <a:pt x="488189" y="16572"/>
-                </a:lnTo>
-                <a:lnTo>
-                  <a:pt x="616446" y="28058"/>
-                </a:lnTo>
-                <a:lnTo>
-                  <a:pt x="732537" y="41649"/>
-                </a:lnTo>
-                <a:lnTo>
-                  <a:pt x="839502" y="56818"/>
-                </a:lnTo>
-                <a:lnTo>
-                  <a:pt x="940384" y="73039"/>
-                </a:lnTo>
-                <a:lnTo>
-                  <a:pt x="1038225" y="89787"/>
-                </a:lnTo>
-                <a:lnTo>
-                  <a:pt x="1136066" y="106534"/>
-                </a:lnTo>
-                <a:lnTo>
-                  <a:pt x="1236948" y="122755"/>
-                </a:lnTo>
-                <a:lnTo>
-                  <a:pt x="1343913" y="137924"/>
-                </a:lnTo>
-                <a:lnTo>
-                  <a:pt x="1460004" y="151515"/>
-                </a:lnTo>
-                <a:lnTo>
-                  <a:pt x="1588261" y="163001"/>
-                </a:lnTo>
-                <a:lnTo>
-                  <a:pt x="1731727" y="171857"/>
-                </a:lnTo>
-                <a:lnTo>
-                  <a:pt x="1893443" y="177556"/>
-                </a:lnTo>
-                <a:lnTo>
-                  <a:pt x="2076450" y="179573"/>
-                </a:lnTo>
-                <a:lnTo>
-                  <a:pt x="2076450" y="352472"/>
-                </a:lnTo>
-                <a:lnTo>
-                  <a:pt x="1893443" y="350455"/>
-                </a:lnTo>
-                <a:lnTo>
-                  <a:pt x="1731727" y="344756"/>
-                </a:lnTo>
-                <a:lnTo>
-                  <a:pt x="1588261" y="335900"/>
-                </a:lnTo>
-                <a:lnTo>
-                  <a:pt x="1460004" y="324414"/>
-                </a:lnTo>
-                <a:lnTo>
-                  <a:pt x="1343913" y="310823"/>
-                </a:lnTo>
-                <a:lnTo>
-                  <a:pt x="1236948" y="295654"/>
-                </a:lnTo>
-                <a:lnTo>
-                  <a:pt x="1136066" y="279433"/>
-                </a:lnTo>
-                <a:lnTo>
-                  <a:pt x="1038225" y="262686"/>
-                </a:lnTo>
-                <a:lnTo>
-                  <a:pt x="940384" y="245938"/>
-                </a:lnTo>
-                <a:lnTo>
-                  <a:pt x="839502" y="229717"/>
-                </a:lnTo>
-                <a:lnTo>
-                  <a:pt x="732537" y="214548"/>
-                </a:lnTo>
-                <a:lnTo>
-                  <a:pt x="616446" y="200957"/>
-                </a:lnTo>
-                <a:lnTo>
-                  <a:pt x="488189" y="189471"/>
-                </a:lnTo>
-                <a:lnTo>
-                  <a:pt x="344723" y="180615"/>
-                </a:lnTo>
-                <a:lnTo>
-                  <a:pt x="183007" y="174916"/>
-                </a:lnTo>
-                <a:lnTo>
-                  <a:pt x="0" y="172899"/>
+                  <a:pt x="180216" y="1986"/>
+                </a:lnTo>
+                <a:lnTo>
+                  <a:pt x="339465" y="7599"/>
+                </a:lnTo>
+                <a:lnTo>
+                  <a:pt x="480743" y="16320"/>
+                </a:lnTo>
+                <a:lnTo>
+                  <a:pt x="607044" y="27631"/>
+                </a:lnTo>
+                <a:lnTo>
+                  <a:pt x="721363" y="41014"/>
+                </a:lnTo>
+                <a:lnTo>
+                  <a:pt x="826697" y="55952"/>
+                </a:lnTo>
+                <a:lnTo>
+                  <a:pt x="926041" y="71926"/>
+                </a:lnTo>
+                <a:lnTo>
+                  <a:pt x="1022389" y="88417"/>
+                </a:lnTo>
+                <a:lnTo>
+                  <a:pt x="1118737" y="104909"/>
+                </a:lnTo>
+                <a:lnTo>
+                  <a:pt x="1218081" y="120883"/>
+                </a:lnTo>
+                <a:lnTo>
+                  <a:pt x="1323415" y="135821"/>
+                </a:lnTo>
+                <a:lnTo>
+                  <a:pt x="1437734" y="149204"/>
+                </a:lnTo>
+                <a:lnTo>
+                  <a:pt x="1564035" y="160515"/>
+                </a:lnTo>
+                <a:lnTo>
+                  <a:pt x="1705313" y="169236"/>
+                </a:lnTo>
+                <a:lnTo>
+                  <a:pt x="1864562" y="174848"/>
+                </a:lnTo>
+                <a:lnTo>
+                  <a:pt x="2044778" y="176834"/>
+                </a:lnTo>
+                <a:lnTo>
+                  <a:pt x="2044778" y="347096"/>
+                </a:lnTo>
+                <a:lnTo>
+                  <a:pt x="1864562" y="345110"/>
+                </a:lnTo>
+                <a:lnTo>
+                  <a:pt x="1705313" y="339498"/>
+                </a:lnTo>
+                <a:lnTo>
+                  <a:pt x="1564035" y="330777"/>
+                </a:lnTo>
+                <a:lnTo>
+                  <a:pt x="1437734" y="319466"/>
+                </a:lnTo>
+                <a:lnTo>
+                  <a:pt x="1323415" y="306082"/>
+                </a:lnTo>
+                <a:lnTo>
+                  <a:pt x="1218081" y="291145"/>
+                </a:lnTo>
+                <a:lnTo>
+                  <a:pt x="1118737" y="275171"/>
+                </a:lnTo>
+                <a:lnTo>
+                  <a:pt x="1022389" y="258679"/>
+                </a:lnTo>
+                <a:lnTo>
+                  <a:pt x="926041" y="242187"/>
+                </a:lnTo>
+                <a:lnTo>
+                  <a:pt x="826697" y="226213"/>
+                </a:lnTo>
+                <a:lnTo>
+                  <a:pt x="721363" y="211276"/>
+                </a:lnTo>
+                <a:lnTo>
+                  <a:pt x="607044" y="197892"/>
+                </a:lnTo>
+                <a:lnTo>
+                  <a:pt x="480743" y="186581"/>
+                </a:lnTo>
+                <a:lnTo>
+                  <a:pt x="339465" y="177860"/>
+                </a:lnTo>
+                <a:lnTo>
+                  <a:pt x="180216" y="172248"/>
+                </a:lnTo>
+                <a:lnTo>
+                  <a:pt x="0" y="170262"/>
                 </a:lnTo>
                 <a:close/>
               </a:path>
@@ -540,7 +540,7 @@
               <a:alpha val="45000"/>
             </a:srgbClr>
           </a:solidFill>
-          <a:ln w="4974">
+          <a:ln w="3175">
             <a:solidFill>
               <a:srgbClr val="ED7D31"/>
             </a:solidFill>
@@ -555,8 +555,8 @@
         </p:nvSpPr>
         <p:spPr>
           <a:xfrm>
-            <a:off x="4469448" y="2065868"/>
-            <a:ext cx="3253105" cy="3855991"/>
+            <a:off x="2952203" y="2678326"/>
+            <a:ext cx="2044778" cy="2423728"/>
           </a:xfrm>
           <a:custGeom>
             <a:avLst/>
@@ -565,108 +565,108 @@
             <a:cxnLst/>
             <a:rect l="0" t="0" r="0" b="0"/>
             <a:pathLst>
-              <a:path w="2076450" h="2461271">
+              <a:path w="2044778" h="2423728">
                 <a:moveTo>
-                  <a:pt x="0" y="1974853"/>
+                  <a:pt x="0" y="1944730"/>
                 </a:moveTo>
                 <a:lnTo>
-                  <a:pt x="183007" y="1952675"/>
-                </a:lnTo>
-                <a:lnTo>
-                  <a:pt x="344723" y="1889996"/>
-                </a:lnTo>
-                <a:lnTo>
-                  <a:pt x="488189" y="1792603"/>
-                </a:lnTo>
-                <a:lnTo>
-                  <a:pt x="616446" y="1666282"/>
-                </a:lnTo>
-                <a:lnTo>
-                  <a:pt x="732537" y="1516818"/>
-                </a:lnTo>
-                <a:lnTo>
-                  <a:pt x="839502" y="1349997"/>
-                </a:lnTo>
-                <a:lnTo>
-                  <a:pt x="940384" y="1171605"/>
-                </a:lnTo>
-                <a:lnTo>
-                  <a:pt x="1038225" y="987427"/>
-                </a:lnTo>
-                <a:lnTo>
-                  <a:pt x="1136066" y="803248"/>
-                </a:lnTo>
-                <a:lnTo>
-                  <a:pt x="1236948" y="624856"/>
-                </a:lnTo>
-                <a:lnTo>
-                  <a:pt x="1343913" y="458035"/>
-                </a:lnTo>
-                <a:lnTo>
-                  <a:pt x="1460004" y="308571"/>
-                </a:lnTo>
-                <a:lnTo>
-                  <a:pt x="1588261" y="182250"/>
-                </a:lnTo>
-                <a:lnTo>
-                  <a:pt x="1731727" y="84857"/>
-                </a:lnTo>
-                <a:lnTo>
-                  <a:pt x="1893443" y="22179"/>
-                </a:lnTo>
-                <a:lnTo>
-                  <a:pt x="2076450" y="0"/>
-                </a:lnTo>
-                <a:lnTo>
-                  <a:pt x="2076450" y="486418"/>
-                </a:lnTo>
-                <a:lnTo>
-                  <a:pt x="1893443" y="508596"/>
-                </a:lnTo>
-                <a:lnTo>
-                  <a:pt x="1731727" y="571275"/>
-                </a:lnTo>
-                <a:lnTo>
-                  <a:pt x="1588261" y="668667"/>
-                </a:lnTo>
-                <a:lnTo>
-                  <a:pt x="1460004" y="794988"/>
-                </a:lnTo>
-                <a:lnTo>
-                  <a:pt x="1343913" y="944452"/>
-                </a:lnTo>
-                <a:lnTo>
-                  <a:pt x="1236948" y="1111273"/>
-                </a:lnTo>
-                <a:lnTo>
-                  <a:pt x="1136066" y="1289666"/>
-                </a:lnTo>
-                <a:lnTo>
-                  <a:pt x="1038225" y="1473844"/>
-                </a:lnTo>
-                <a:lnTo>
-                  <a:pt x="940384" y="1658022"/>
-                </a:lnTo>
-                <a:lnTo>
-                  <a:pt x="839502" y="1836415"/>
-                </a:lnTo>
-                <a:lnTo>
-                  <a:pt x="732537" y="2003236"/>
-                </a:lnTo>
-                <a:lnTo>
-                  <a:pt x="616446" y="2152700"/>
-                </a:lnTo>
-                <a:lnTo>
-                  <a:pt x="488189" y="2279021"/>
-                </a:lnTo>
-                <a:lnTo>
-                  <a:pt x="344723" y="2376414"/>
-                </a:lnTo>
-                <a:lnTo>
-                  <a:pt x="183007" y="2439092"/>
-                </a:lnTo>
-                <a:lnTo>
-                  <a:pt x="0" y="2461271"/>
+                  <a:pt x="180216" y="1922890"/>
+                </a:lnTo>
+                <a:lnTo>
+                  <a:pt x="339465" y="1861167"/>
+                </a:lnTo>
+                <a:lnTo>
+                  <a:pt x="480743" y="1765260"/>
+                </a:lnTo>
+                <a:lnTo>
+                  <a:pt x="607044" y="1640866"/>
+                </a:lnTo>
+                <a:lnTo>
+                  <a:pt x="721363" y="1493682"/>
+                </a:lnTo>
+                <a:lnTo>
+                  <a:pt x="826697" y="1329405"/>
+                </a:lnTo>
+                <a:lnTo>
+                  <a:pt x="926041" y="1153734"/>
+                </a:lnTo>
+                <a:lnTo>
+                  <a:pt x="1022389" y="972365"/>
+                </a:lnTo>
+                <a:lnTo>
+                  <a:pt x="1118737" y="790996"/>
+                </a:lnTo>
+                <a:lnTo>
+                  <a:pt x="1218081" y="615325"/>
+                </a:lnTo>
+                <a:lnTo>
+                  <a:pt x="1323415" y="451048"/>
+                </a:lnTo>
+                <a:lnTo>
+                  <a:pt x="1437734" y="303864"/>
+                </a:lnTo>
+                <a:lnTo>
+                  <a:pt x="1564035" y="179470"/>
+                </a:lnTo>
+                <a:lnTo>
+                  <a:pt x="1705313" y="83563"/>
+                </a:lnTo>
+                <a:lnTo>
+                  <a:pt x="1864562" y="21840"/>
+                </a:lnTo>
+                <a:lnTo>
+                  <a:pt x="2044778" y="0"/>
+                </a:lnTo>
+                <a:lnTo>
+                  <a:pt x="2044778" y="478998"/>
+                </a:lnTo>
+                <a:lnTo>
+                  <a:pt x="1864562" y="500838"/>
+                </a:lnTo>
+                <a:lnTo>
+                  <a:pt x="1705313" y="562561"/>
+                </a:lnTo>
+                <a:lnTo>
+                  <a:pt x="1564035" y="658468"/>
+                </a:lnTo>
+                <a:lnTo>
+                  <a:pt x="1437734" y="782862"/>
+                </a:lnTo>
+                <a:lnTo>
+                  <a:pt x="1323415" y="930046"/>
+                </a:lnTo>
+                <a:lnTo>
+                  <a:pt x="1218081" y="1094323"/>
+                </a:lnTo>
+                <a:lnTo>
+                  <a:pt x="1118737" y="1269994"/>
+                </a:lnTo>
+                <a:lnTo>
+                  <a:pt x="1022389" y="1451363"/>
+                </a:lnTo>
+                <a:lnTo>
+                  <a:pt x="926041" y="1632732"/>
+                </a:lnTo>
+                <a:lnTo>
+                  <a:pt x="826697" y="1808403"/>
+                </a:lnTo>
+                <a:lnTo>
+                  <a:pt x="721363" y="1972680"/>
+                </a:lnTo>
+                <a:lnTo>
+                  <a:pt x="607044" y="2119864"/>
+                </a:lnTo>
+                <a:lnTo>
+                  <a:pt x="480743" y="2244258"/>
+                </a:lnTo>
+                <a:lnTo>
+                  <a:pt x="339465" y="2340165"/>
+                </a:lnTo>
+                <a:lnTo>
+                  <a:pt x="180216" y="2401888"/>
+                </a:lnTo>
+                <a:lnTo>
+                  <a:pt x="0" y="2423728"/>
                 </a:lnTo>
                 <a:close/>
               </a:path>
@@ -677,7 +677,7 @@
               <a:alpha val="45000"/>
             </a:srgbClr>
           </a:solidFill>
-          <a:ln w="4974">
+          <a:ln w="3175">
             <a:solidFill>
               <a:srgbClr val="2E8B8B"/>
             </a:solidFill>
@@ -692,8 +692,8 @@
         </p:nvSpPr>
         <p:spPr>
           <a:xfrm>
-            <a:off x="4469448" y="1784537"/>
-            <a:ext cx="6715125" cy="1143187"/>
+            <a:off x="2952203" y="2501492"/>
+            <a:ext cx="4220871" cy="718564"/>
           </a:xfrm>
           <a:custGeom>
             <a:avLst/>
@@ -702,108 +702,108 @@
             <a:cxnLst/>
             <a:rect l="0" t="0" r="0" b="0"/>
             <a:pathLst>
-              <a:path w="4286250" h="729694">
+              <a:path w="4220871" h="718564">
                 <a:moveTo>
                   <a:pt x="0" y="0"/>
                 </a:moveTo>
                 <a:lnTo>
-                  <a:pt x="377768" y="7472"/>
-                </a:lnTo>
-                <a:lnTo>
-                  <a:pt x="711584" y="28588"/>
-                </a:lnTo>
-                <a:lnTo>
-                  <a:pt x="1007729" y="61400"/>
-                </a:lnTo>
-                <a:lnTo>
-                  <a:pt x="1272480" y="103958"/>
-                </a:lnTo>
-                <a:lnTo>
-                  <a:pt x="1512117" y="154312"/>
-                </a:lnTo>
-                <a:lnTo>
-                  <a:pt x="1732917" y="210514"/>
-                </a:lnTo>
-                <a:lnTo>
-                  <a:pt x="1941161" y="270615"/>
-                </a:lnTo>
-                <a:lnTo>
-                  <a:pt x="2143125" y="332664"/>
-                </a:lnTo>
-                <a:lnTo>
-                  <a:pt x="2345089" y="394714"/>
-                </a:lnTo>
-                <a:lnTo>
-                  <a:pt x="2553333" y="454814"/>
-                </a:lnTo>
-                <a:lnTo>
-                  <a:pt x="2774133" y="511016"/>
-                </a:lnTo>
-                <a:lnTo>
-                  <a:pt x="3013770" y="561371"/>
-                </a:lnTo>
-                <a:lnTo>
-                  <a:pt x="3278521" y="603928"/>
-                </a:lnTo>
-                <a:lnTo>
-                  <a:pt x="3574666" y="636740"/>
-                </a:lnTo>
-                <a:lnTo>
-                  <a:pt x="3908482" y="657856"/>
-                </a:lnTo>
-                <a:lnTo>
-                  <a:pt x="4286250" y="665328"/>
-                </a:lnTo>
-                <a:lnTo>
-                  <a:pt x="4286250" y="729694"/>
-                </a:lnTo>
-                <a:lnTo>
-                  <a:pt x="3908482" y="722222"/>
-                </a:lnTo>
-                <a:lnTo>
-                  <a:pt x="3574666" y="701106"/>
-                </a:lnTo>
-                <a:lnTo>
-                  <a:pt x="3278521" y="668294"/>
-                </a:lnTo>
-                <a:lnTo>
-                  <a:pt x="3013770" y="625736"/>
-                </a:lnTo>
-                <a:lnTo>
-                  <a:pt x="2774133" y="575382"/>
-                </a:lnTo>
-                <a:lnTo>
-                  <a:pt x="2553333" y="519180"/>
-                </a:lnTo>
-                <a:lnTo>
-                  <a:pt x="2345089" y="459079"/>
-                </a:lnTo>
-                <a:lnTo>
-                  <a:pt x="2143125" y="397030"/>
-                </a:lnTo>
-                <a:lnTo>
-                  <a:pt x="1941161" y="334980"/>
-                </a:lnTo>
-                <a:lnTo>
-                  <a:pt x="1732917" y="274880"/>
-                </a:lnTo>
-                <a:lnTo>
-                  <a:pt x="1512117" y="218678"/>
-                </a:lnTo>
-                <a:lnTo>
-                  <a:pt x="1272480" y="168323"/>
-                </a:lnTo>
-                <a:lnTo>
-                  <a:pt x="1007729" y="125766"/>
-                </a:lnTo>
-                <a:lnTo>
-                  <a:pt x="711584" y="92954"/>
-                </a:lnTo>
-                <a:lnTo>
-                  <a:pt x="377768" y="71838"/>
-                </a:lnTo>
-                <a:lnTo>
-                  <a:pt x="0" y="64366"/>
+                  <a:pt x="372006" y="7358"/>
+                </a:lnTo>
+                <a:lnTo>
+                  <a:pt x="700731" y="28152"/>
+                </a:lnTo>
+                <a:lnTo>
+                  <a:pt x="992358" y="60463"/>
+                </a:lnTo>
+                <a:lnTo>
+                  <a:pt x="1253071" y="102372"/>
+                </a:lnTo>
+                <a:lnTo>
+                  <a:pt x="1489053" y="151958"/>
+                </a:lnTo>
+                <a:lnTo>
+                  <a:pt x="1706485" y="207303"/>
+                </a:lnTo>
+                <a:lnTo>
+                  <a:pt x="1911552" y="266487"/>
+                </a:lnTo>
+                <a:lnTo>
+                  <a:pt x="2110436" y="327590"/>
+                </a:lnTo>
+                <a:lnTo>
+                  <a:pt x="2309319" y="388693"/>
+                </a:lnTo>
+                <a:lnTo>
+                  <a:pt x="2514386" y="447877"/>
+                </a:lnTo>
+                <a:lnTo>
+                  <a:pt x="2731819" y="503222"/>
+                </a:lnTo>
+                <a:lnTo>
+                  <a:pt x="2967800" y="552808"/>
+                </a:lnTo>
+                <a:lnTo>
+                  <a:pt x="3228513" y="594716"/>
+                </a:lnTo>
+                <a:lnTo>
+                  <a:pt x="3520140" y="627028"/>
+                </a:lnTo>
+                <a:lnTo>
+                  <a:pt x="3848865" y="647822"/>
+                </a:lnTo>
+                <a:lnTo>
+                  <a:pt x="4220871" y="655180"/>
+                </a:lnTo>
+                <a:lnTo>
+                  <a:pt x="4220871" y="718564"/>
+                </a:lnTo>
+                <a:lnTo>
+                  <a:pt x="3848865" y="711206"/>
+                </a:lnTo>
+                <a:lnTo>
+                  <a:pt x="3520140" y="690411"/>
+                </a:lnTo>
+                <a:lnTo>
+                  <a:pt x="3228513" y="658100"/>
+                </a:lnTo>
+                <a:lnTo>
+                  <a:pt x="2967800" y="616192"/>
+                </a:lnTo>
+                <a:lnTo>
+                  <a:pt x="2731819" y="566606"/>
+                </a:lnTo>
+                <a:lnTo>
+                  <a:pt x="2514386" y="511261"/>
+                </a:lnTo>
+                <a:lnTo>
+                  <a:pt x="2309319" y="452077"/>
+                </a:lnTo>
+                <a:lnTo>
+                  <a:pt x="2110436" y="390974"/>
+                </a:lnTo>
+                <a:lnTo>
+                  <a:pt x="1911552" y="329871"/>
+                </a:lnTo>
+                <a:lnTo>
+                  <a:pt x="1706485" y="270687"/>
+                </a:lnTo>
+                <a:lnTo>
+                  <a:pt x="1489053" y="215342"/>
+                </a:lnTo>
+                <a:lnTo>
+                  <a:pt x="1253071" y="165756"/>
+                </a:lnTo>
+                <a:lnTo>
+                  <a:pt x="992358" y="123847"/>
+                </a:lnTo>
+                <a:lnTo>
+                  <a:pt x="700731" y="91536"/>
+                </a:lnTo>
+                <a:lnTo>
+                  <a:pt x="372006" y="70742"/>
+                </a:lnTo>
+                <a:lnTo>
+                  <a:pt x="0" y="63384"/>
                 </a:lnTo>
                 <a:close/>
               </a:path>
@@ -814,7 +814,7 @@
               <a:alpha val="45000"/>
             </a:srgbClr>
           </a:solidFill>
-          <a:ln w="4974">
+          <a:ln w="3175">
             <a:solidFill>
               <a:srgbClr val="ED7D31"/>
             </a:solidFill>
@@ -829,8 +829,8 @@
         </p:nvSpPr>
         <p:spPr>
           <a:xfrm>
-            <a:off x="4469448" y="1885377"/>
-            <a:ext cx="3253105" cy="4216973"/>
+            <a:off x="2952203" y="2564876"/>
+            <a:ext cx="2044778" cy="2650628"/>
           </a:xfrm>
           <a:custGeom>
             <a:avLst/>
@@ -839,108 +839,108 @@
             <a:cxnLst/>
             <a:rect l="0" t="0" r="0" b="0"/>
             <a:pathLst>
-              <a:path w="2076450" h="2691685">
+              <a:path w="2044778" h="2650628">
                 <a:moveTo>
                   <a:pt x="0" y="0"/>
                 </a:moveTo>
                 <a:lnTo>
-                  <a:pt x="183007" y="9965"/>
-                </a:lnTo>
-                <a:lnTo>
-                  <a:pt x="344723" y="38129"/>
-                </a:lnTo>
-                <a:lnTo>
-                  <a:pt x="488189" y="81891"/>
-                </a:lnTo>
-                <a:lnTo>
-                  <a:pt x="616446" y="138652"/>
-                </a:lnTo>
-                <a:lnTo>
-                  <a:pt x="732537" y="205812"/>
-                </a:lnTo>
-                <a:lnTo>
-                  <a:pt x="839502" y="280771"/>
-                </a:lnTo>
-                <a:lnTo>
-                  <a:pt x="940384" y="360929"/>
-                </a:lnTo>
-                <a:lnTo>
-                  <a:pt x="1038225" y="443687"/>
-                </a:lnTo>
-                <a:lnTo>
-                  <a:pt x="1136066" y="526445"/>
-                </a:lnTo>
-                <a:lnTo>
-                  <a:pt x="1236948" y="606604"/>
-                </a:lnTo>
-                <a:lnTo>
-                  <a:pt x="1343913" y="681563"/>
-                </a:lnTo>
-                <a:lnTo>
-                  <a:pt x="1460004" y="748722"/>
-                </a:lnTo>
-                <a:lnTo>
-                  <a:pt x="1588261" y="805483"/>
-                </a:lnTo>
-                <a:lnTo>
-                  <a:pt x="1731727" y="849245"/>
-                </a:lnTo>
-                <a:lnTo>
-                  <a:pt x="1893443" y="877409"/>
-                </a:lnTo>
-                <a:lnTo>
-                  <a:pt x="2076450" y="887375"/>
-                </a:lnTo>
-                <a:lnTo>
-                  <a:pt x="2076450" y="2691685"/>
-                </a:lnTo>
-                <a:lnTo>
-                  <a:pt x="1893443" y="2681719"/>
-                </a:lnTo>
-                <a:lnTo>
-                  <a:pt x="1731727" y="2653556"/>
-                </a:lnTo>
-                <a:lnTo>
-                  <a:pt x="1588261" y="2609793"/>
-                </a:lnTo>
-                <a:lnTo>
-                  <a:pt x="1460004" y="2553033"/>
-                </a:lnTo>
-                <a:lnTo>
-                  <a:pt x="1343913" y="2485873"/>
-                </a:lnTo>
-                <a:lnTo>
-                  <a:pt x="1236948" y="2410914"/>
-                </a:lnTo>
-                <a:lnTo>
-                  <a:pt x="1136066" y="2330756"/>
-                </a:lnTo>
-                <a:lnTo>
-                  <a:pt x="1038225" y="2247998"/>
-                </a:lnTo>
-                <a:lnTo>
-                  <a:pt x="940384" y="2165239"/>
-                </a:lnTo>
-                <a:lnTo>
-                  <a:pt x="839502" y="2085081"/>
-                </a:lnTo>
-                <a:lnTo>
-                  <a:pt x="732537" y="2010122"/>
-                </a:lnTo>
-                <a:lnTo>
-                  <a:pt x="616446" y="1942962"/>
-                </a:lnTo>
-                <a:lnTo>
-                  <a:pt x="488189" y="1886202"/>
-                </a:lnTo>
-                <a:lnTo>
-                  <a:pt x="344723" y="1842439"/>
-                </a:lnTo>
-                <a:lnTo>
-                  <a:pt x="183007" y="1814276"/>
-                </a:lnTo>
-                <a:lnTo>
-                  <a:pt x="0" y="1804310"/>
+                  <a:pt x="180216" y="9814"/>
+                </a:lnTo>
+                <a:lnTo>
+                  <a:pt x="339465" y="37548"/>
+                </a:lnTo>
+                <a:lnTo>
+                  <a:pt x="480743" y="80642"/>
+                </a:lnTo>
+                <a:lnTo>
+                  <a:pt x="607044" y="136537"/>
+                </a:lnTo>
+                <a:lnTo>
+                  <a:pt x="721363" y="202673"/>
+                </a:lnTo>
+                <a:lnTo>
+                  <a:pt x="826697" y="276488"/>
+                </a:lnTo>
+                <a:lnTo>
+                  <a:pt x="926041" y="355424"/>
+                </a:lnTo>
+                <a:lnTo>
+                  <a:pt x="1022389" y="436920"/>
+                </a:lnTo>
+                <a:lnTo>
+                  <a:pt x="1118737" y="518415"/>
+                </a:lnTo>
+                <a:lnTo>
+                  <a:pt x="1218081" y="597351"/>
+                </a:lnTo>
+                <a:lnTo>
+                  <a:pt x="1323415" y="671167"/>
+                </a:lnTo>
+                <a:lnTo>
+                  <a:pt x="1437734" y="737302"/>
+                </a:lnTo>
+                <a:lnTo>
+                  <a:pt x="1564035" y="793197"/>
+                </a:lnTo>
+                <a:lnTo>
+                  <a:pt x="1705313" y="836292"/>
+                </a:lnTo>
+                <a:lnTo>
+                  <a:pt x="1864562" y="864026"/>
+                </a:lnTo>
+                <a:lnTo>
+                  <a:pt x="2044778" y="873839"/>
+                </a:lnTo>
+                <a:lnTo>
+                  <a:pt x="2044778" y="2650628"/>
+                </a:lnTo>
+                <a:lnTo>
+                  <a:pt x="1864562" y="2640814"/>
+                </a:lnTo>
+                <a:lnTo>
+                  <a:pt x="1705313" y="2613080"/>
+                </a:lnTo>
+                <a:lnTo>
+                  <a:pt x="1564035" y="2569986"/>
+                </a:lnTo>
+                <a:lnTo>
+                  <a:pt x="1437734" y="2514091"/>
+                </a:lnTo>
+                <a:lnTo>
+                  <a:pt x="1323415" y="2447955"/>
+                </a:lnTo>
+                <a:lnTo>
+                  <a:pt x="1218081" y="2374140"/>
+                </a:lnTo>
+                <a:lnTo>
+                  <a:pt x="1118737" y="2295204"/>
+                </a:lnTo>
+                <a:lnTo>
+                  <a:pt x="1022389" y="2213708"/>
+                </a:lnTo>
+                <a:lnTo>
+                  <a:pt x="926041" y="2132213"/>
+                </a:lnTo>
+                <a:lnTo>
+                  <a:pt x="826697" y="2053277"/>
+                </a:lnTo>
+                <a:lnTo>
+                  <a:pt x="721363" y="1979461"/>
+                </a:lnTo>
+                <a:lnTo>
+                  <a:pt x="607044" y="1913326"/>
+                </a:lnTo>
+                <a:lnTo>
+                  <a:pt x="480743" y="1857431"/>
+                </a:lnTo>
+                <a:lnTo>
+                  <a:pt x="339465" y="1814336"/>
+                </a:lnTo>
+                <a:lnTo>
+                  <a:pt x="180216" y="1786602"/>
+                </a:lnTo>
+                <a:lnTo>
+                  <a:pt x="0" y="1776789"/>
                 </a:lnTo>
                 <a:close/>
               </a:path>
@@ -951,7 +951,7 @@
               <a:alpha val="45000"/>
             </a:srgbClr>
           </a:solidFill>
-          <a:ln w="4974">
+          <a:ln w="3175">
             <a:solidFill>
               <a:srgbClr val="ED7D31"/>
             </a:solidFill>
@@ -966,8 +966,8 @@
         </p:nvSpPr>
         <p:spPr>
           <a:xfrm>
-            <a:off x="7931468" y="3275598"/>
-            <a:ext cx="3253105" cy="1327018"/>
+            <a:off x="5128297" y="3438715"/>
+            <a:ext cx="2044777" cy="834113"/>
           </a:xfrm>
           <a:custGeom>
             <a:avLst/>
@@ -976,108 +976,108 @@
             <a:cxnLst/>
             <a:rect l="0" t="0" r="0" b="0"/>
             <a:pathLst>
-              <a:path w="2076450" h="847033">
+              <a:path w="2044777" h="834113">
                 <a:moveTo>
                   <a:pt x="0" y="0"/>
                 </a:moveTo>
                 <a:lnTo>
-                  <a:pt x="183007" y="3766"/>
-                </a:lnTo>
-                <a:lnTo>
-                  <a:pt x="344723" y="14408"/>
-                </a:lnTo>
-                <a:lnTo>
-                  <a:pt x="488189" y="30945"/>
-                </a:lnTo>
-                <a:lnTo>
-                  <a:pt x="616446" y="52394"/>
-                </a:lnTo>
-                <a:lnTo>
-                  <a:pt x="732537" y="77773"/>
-                </a:lnTo>
-                <a:lnTo>
-                  <a:pt x="839502" y="106099"/>
-                </a:lnTo>
-                <a:lnTo>
-                  <a:pt x="940384" y="136390"/>
-                </a:lnTo>
-                <a:lnTo>
-                  <a:pt x="1038225" y="167663"/>
-                </a:lnTo>
-                <a:lnTo>
-                  <a:pt x="1136066" y="198936"/>
-                </a:lnTo>
-                <a:lnTo>
-                  <a:pt x="1236948" y="229227"/>
-                </a:lnTo>
-                <a:lnTo>
-                  <a:pt x="1343913" y="257552"/>
-                </a:lnTo>
-                <a:lnTo>
-                  <a:pt x="1460004" y="282931"/>
-                </a:lnTo>
-                <a:lnTo>
-                  <a:pt x="1588261" y="304380"/>
-                </a:lnTo>
-                <a:lnTo>
-                  <a:pt x="1731727" y="320917"/>
-                </a:lnTo>
-                <a:lnTo>
-                  <a:pt x="1893443" y="331560"/>
-                </a:lnTo>
-                <a:lnTo>
-                  <a:pt x="2076450" y="335326"/>
-                </a:lnTo>
-                <a:lnTo>
-                  <a:pt x="2076450" y="847033"/>
-                </a:lnTo>
-                <a:lnTo>
-                  <a:pt x="1893443" y="843267"/>
-                </a:lnTo>
-                <a:lnTo>
-                  <a:pt x="1731727" y="832624"/>
-                </a:lnTo>
-                <a:lnTo>
-                  <a:pt x="1588261" y="816087"/>
-                </a:lnTo>
-                <a:lnTo>
-                  <a:pt x="1460004" y="794638"/>
-                </a:lnTo>
-                <a:lnTo>
-                  <a:pt x="1343913" y="769259"/>
-                </a:lnTo>
-                <a:lnTo>
-                  <a:pt x="1236948" y="740933"/>
-                </a:lnTo>
-                <a:lnTo>
-                  <a:pt x="1136066" y="710643"/>
-                </a:lnTo>
-                <a:lnTo>
-                  <a:pt x="1038225" y="679370"/>
-                </a:lnTo>
-                <a:lnTo>
-                  <a:pt x="940384" y="648096"/>
-                </a:lnTo>
-                <a:lnTo>
-                  <a:pt x="839502" y="617806"/>
-                </a:lnTo>
-                <a:lnTo>
-                  <a:pt x="732537" y="589480"/>
-                </a:lnTo>
-                <a:lnTo>
-                  <a:pt x="616446" y="564101"/>
-                </a:lnTo>
-                <a:lnTo>
-                  <a:pt x="488189" y="542652"/>
-                </a:lnTo>
-                <a:lnTo>
-                  <a:pt x="344723" y="526115"/>
-                </a:lnTo>
-                <a:lnTo>
-                  <a:pt x="183007" y="515472"/>
-                </a:lnTo>
-                <a:lnTo>
-                  <a:pt x="0" y="511706"/>
+                  <a:pt x="180216" y="3709"/>
+                </a:lnTo>
+                <a:lnTo>
+                  <a:pt x="339465" y="14189"/>
+                </a:lnTo>
+                <a:lnTo>
+                  <a:pt x="480742" y="30474"/>
+                </a:lnTo>
+                <a:lnTo>
+                  <a:pt x="607043" y="51596"/>
+                </a:lnTo>
+                <a:lnTo>
+                  <a:pt x="721363" y="76588"/>
+                </a:lnTo>
+                <a:lnTo>
+                  <a:pt x="826697" y="104481"/>
+                </a:lnTo>
+                <a:lnTo>
+                  <a:pt x="926040" y="134310"/>
+                </a:lnTo>
+                <a:lnTo>
+                  <a:pt x="1022388" y="165106"/>
+                </a:lnTo>
+                <a:lnTo>
+                  <a:pt x="1118736" y="195902"/>
+                </a:lnTo>
+                <a:lnTo>
+                  <a:pt x="1218080" y="225731"/>
+                </a:lnTo>
+                <a:lnTo>
+                  <a:pt x="1323414" y="253625"/>
+                </a:lnTo>
+                <a:lnTo>
+                  <a:pt x="1437734" y="278616"/>
+                </a:lnTo>
+                <a:lnTo>
+                  <a:pt x="1564034" y="299738"/>
+                </a:lnTo>
+                <a:lnTo>
+                  <a:pt x="1705312" y="316023"/>
+                </a:lnTo>
+                <a:lnTo>
+                  <a:pt x="1864561" y="326503"/>
+                </a:lnTo>
+                <a:lnTo>
+                  <a:pt x="2044777" y="330212"/>
+                </a:lnTo>
+                <a:lnTo>
+                  <a:pt x="2044777" y="834113"/>
+                </a:lnTo>
+                <a:lnTo>
+                  <a:pt x="1864561" y="830405"/>
+                </a:lnTo>
+                <a:lnTo>
+                  <a:pt x="1705312" y="819925"/>
+                </a:lnTo>
+                <a:lnTo>
+                  <a:pt x="1564034" y="803640"/>
+                </a:lnTo>
+                <a:lnTo>
+                  <a:pt x="1437734" y="782518"/>
+                </a:lnTo>
+                <a:lnTo>
+                  <a:pt x="1323414" y="757526"/>
+                </a:lnTo>
+                <a:lnTo>
+                  <a:pt x="1218080" y="729632"/>
+                </a:lnTo>
+                <a:lnTo>
+                  <a:pt x="1118736" y="699804"/>
+                </a:lnTo>
+                <a:lnTo>
+                  <a:pt x="1022388" y="669008"/>
+                </a:lnTo>
+                <a:lnTo>
+                  <a:pt x="926040" y="638212"/>
+                </a:lnTo>
+                <a:lnTo>
+                  <a:pt x="826697" y="608383"/>
+                </a:lnTo>
+                <a:lnTo>
+                  <a:pt x="721363" y="580489"/>
+                </a:lnTo>
+                <a:lnTo>
+                  <a:pt x="607043" y="555498"/>
+                </a:lnTo>
+                <a:lnTo>
+                  <a:pt x="480742" y="534376"/>
+                </a:lnTo>
+                <a:lnTo>
+                  <a:pt x="339465" y="518091"/>
+                </a:lnTo>
+                <a:lnTo>
+                  <a:pt x="180216" y="507610"/>
+                </a:lnTo>
+                <a:lnTo>
+                  <a:pt x="0" y="503902"/>
                 </a:lnTo>
                 <a:close/>
               </a:path>
@@ -1088,7 +1088,7 @@
               <a:alpha val="45000"/>
             </a:srgbClr>
           </a:solidFill>
-          <a:ln w="4974">
+          <a:ln w="3175">
             <a:solidFill>
               <a:srgbClr val="7030A0"/>
             </a:solidFill>
@@ -1103,8 +1103,8 @@
         </p:nvSpPr>
         <p:spPr>
           <a:xfrm>
-            <a:off x="7931468" y="1794993"/>
-            <a:ext cx="3253105" cy="2005949"/>
+            <a:off x="5128297" y="2508064"/>
+            <a:ext cx="2044777" cy="1260863"/>
           </a:xfrm>
           <a:custGeom>
             <a:avLst/>
@@ -1113,108 +1113,108 @@
             <a:cxnLst/>
             <a:rect l="0" t="0" r="0" b="0"/>
             <a:pathLst>
-              <a:path w="2076450" h="1280393">
+              <a:path w="2044777" h="1260863">
                 <a:moveTo>
                   <a:pt x="0" y="0"/>
                 </a:moveTo>
                 <a:lnTo>
-                  <a:pt x="183007" y="11474"/>
-                </a:lnTo>
-                <a:lnTo>
-                  <a:pt x="344723" y="43899"/>
-                </a:lnTo>
-                <a:lnTo>
-                  <a:pt x="488189" y="94283"/>
-                </a:lnTo>
-                <a:lnTo>
-                  <a:pt x="616446" y="159632"/>
-                </a:lnTo>
-                <a:lnTo>
-                  <a:pt x="732537" y="236953"/>
-                </a:lnTo>
-                <a:lnTo>
-                  <a:pt x="839502" y="323254"/>
-                </a:lnTo>
-                <a:lnTo>
-                  <a:pt x="940384" y="415541"/>
-                </a:lnTo>
-                <a:lnTo>
-                  <a:pt x="1038225" y="510822"/>
-                </a:lnTo>
-                <a:lnTo>
-                  <a:pt x="1136066" y="606102"/>
-                </a:lnTo>
-                <a:lnTo>
-                  <a:pt x="1236948" y="698389"/>
-                </a:lnTo>
-                <a:lnTo>
-                  <a:pt x="1343913" y="784690"/>
-                </a:lnTo>
-                <a:lnTo>
-                  <a:pt x="1460004" y="862011"/>
-                </a:lnTo>
-                <a:lnTo>
-                  <a:pt x="1588261" y="927361"/>
-                </a:lnTo>
-                <a:lnTo>
-                  <a:pt x="1731727" y="977744"/>
-                </a:lnTo>
-                <a:lnTo>
-                  <a:pt x="1893443" y="1010170"/>
-                </a:lnTo>
-                <a:lnTo>
-                  <a:pt x="2076450" y="1021643"/>
-                </a:lnTo>
-                <a:lnTo>
-                  <a:pt x="2076450" y="1280393"/>
-                </a:lnTo>
-                <a:lnTo>
-                  <a:pt x="1893443" y="1268919"/>
-                </a:lnTo>
-                <a:lnTo>
-                  <a:pt x="1731727" y="1236494"/>
-                </a:lnTo>
-                <a:lnTo>
-                  <a:pt x="1588261" y="1186110"/>
-                </a:lnTo>
-                <a:lnTo>
-                  <a:pt x="1460004" y="1120761"/>
-                </a:lnTo>
-                <a:lnTo>
-                  <a:pt x="1343913" y="1043440"/>
-                </a:lnTo>
-                <a:lnTo>
-                  <a:pt x="1236948" y="957139"/>
-                </a:lnTo>
-                <a:lnTo>
-                  <a:pt x="1136066" y="864852"/>
-                </a:lnTo>
-                <a:lnTo>
-                  <a:pt x="1038225" y="769571"/>
-                </a:lnTo>
-                <a:lnTo>
-                  <a:pt x="940384" y="674291"/>
-                </a:lnTo>
-                <a:lnTo>
-                  <a:pt x="839502" y="582004"/>
-                </a:lnTo>
-                <a:lnTo>
-                  <a:pt x="732537" y="495703"/>
-                </a:lnTo>
-                <a:lnTo>
-                  <a:pt x="616446" y="418382"/>
-                </a:lnTo>
-                <a:lnTo>
-                  <a:pt x="488189" y="353032"/>
-                </a:lnTo>
-                <a:lnTo>
-                  <a:pt x="344723" y="302649"/>
-                </a:lnTo>
-                <a:lnTo>
-                  <a:pt x="183007" y="270224"/>
-                </a:lnTo>
-                <a:lnTo>
-                  <a:pt x="0" y="258750"/>
+                  <a:pt x="180216" y="11299"/>
+                </a:lnTo>
+                <a:lnTo>
+                  <a:pt x="339465" y="43229"/>
+                </a:lnTo>
+                <a:lnTo>
+                  <a:pt x="480742" y="92845"/>
+                </a:lnTo>
+                <a:lnTo>
+                  <a:pt x="607043" y="157197"/>
+                </a:lnTo>
+                <a:lnTo>
+                  <a:pt x="721363" y="233339"/>
+                </a:lnTo>
+                <a:lnTo>
+                  <a:pt x="826697" y="318324"/>
+                </a:lnTo>
+                <a:lnTo>
+                  <a:pt x="926040" y="409203"/>
+                </a:lnTo>
+                <a:lnTo>
+                  <a:pt x="1022388" y="503030"/>
+                </a:lnTo>
+                <a:lnTo>
+                  <a:pt x="1118736" y="596857"/>
+                </a:lnTo>
+                <a:lnTo>
+                  <a:pt x="1218080" y="687736"/>
+                </a:lnTo>
+                <a:lnTo>
+                  <a:pt x="1323414" y="772721"/>
+                </a:lnTo>
+                <a:lnTo>
+                  <a:pt x="1437734" y="848863"/>
+                </a:lnTo>
+                <a:lnTo>
+                  <a:pt x="1564034" y="913215"/>
+                </a:lnTo>
+                <a:lnTo>
+                  <a:pt x="1705312" y="962831"/>
+                </a:lnTo>
+                <a:lnTo>
+                  <a:pt x="1864561" y="994761"/>
+                </a:lnTo>
+                <a:lnTo>
+                  <a:pt x="2044777" y="1006060"/>
+                </a:lnTo>
+                <a:lnTo>
+                  <a:pt x="2044777" y="1260863"/>
+                </a:lnTo>
+                <a:lnTo>
+                  <a:pt x="1864561" y="1249564"/>
+                </a:lnTo>
+                <a:lnTo>
+                  <a:pt x="1705312" y="1217634"/>
+                </a:lnTo>
+                <a:lnTo>
+                  <a:pt x="1564034" y="1168019"/>
+                </a:lnTo>
+                <a:lnTo>
+                  <a:pt x="1437734" y="1103666"/>
+                </a:lnTo>
+                <a:lnTo>
+                  <a:pt x="1323414" y="1027524"/>
+                </a:lnTo>
+                <a:lnTo>
+                  <a:pt x="1218080" y="942539"/>
+                </a:lnTo>
+                <a:lnTo>
+                  <a:pt x="1118736" y="851660"/>
+                </a:lnTo>
+                <a:lnTo>
+                  <a:pt x="1022388" y="757833"/>
+                </a:lnTo>
+                <a:lnTo>
+                  <a:pt x="926040" y="664006"/>
+                </a:lnTo>
+                <a:lnTo>
+                  <a:pt x="826697" y="573127"/>
+                </a:lnTo>
+                <a:lnTo>
+                  <a:pt x="721363" y="488142"/>
+                </a:lnTo>
+                <a:lnTo>
+                  <a:pt x="607043" y="412000"/>
+                </a:lnTo>
+                <a:lnTo>
+                  <a:pt x="480742" y="347648"/>
+                </a:lnTo>
+                <a:lnTo>
+                  <a:pt x="339465" y="298033"/>
+                </a:lnTo>
+                <a:lnTo>
+                  <a:pt x="180216" y="266102"/>
+                </a:lnTo>
+                <a:lnTo>
+                  <a:pt x="0" y="254803"/>
                 </a:lnTo>
                 <a:close/>
               </a:path>
@@ -1225,7 +1225,7 @@
               <a:alpha val="45000"/>
             </a:srgbClr>
           </a:solidFill>
-          <a:ln w="4974">
+          <a:ln w="3175">
             <a:solidFill>
               <a:srgbClr val="FFC000"/>
             </a:solidFill>
@@ -1240,8 +1240,8 @@
         </p:nvSpPr>
         <p:spPr>
           <a:xfrm>
-            <a:off x="7931468" y="1327150"/>
-            <a:ext cx="3253105" cy="2068417"/>
+            <a:off x="5128297" y="2213996"/>
+            <a:ext cx="2044777" cy="1300128"/>
           </a:xfrm>
           <a:custGeom>
             <a:avLst/>
@@ -1250,108 +1250,108 @@
             <a:cxnLst/>
             <a:rect l="0" t="0" r="0" b="0"/>
             <a:pathLst>
-              <a:path w="2076450" h="1320266">
+              <a:path w="2044777" h="1300128">
                 <a:moveTo>
                   <a:pt x="0" y="0"/>
                 </a:moveTo>
                 <a:lnTo>
-                  <a:pt x="183007" y="14683"/>
-                </a:lnTo>
-                <a:lnTo>
-                  <a:pt x="344723" y="56177"/>
-                </a:lnTo>
-                <a:lnTo>
-                  <a:pt x="488189" y="120653"/>
-                </a:lnTo>
-                <a:lnTo>
-                  <a:pt x="616446" y="204280"/>
-                </a:lnTo>
-                <a:lnTo>
-                  <a:pt x="732537" y="303228"/>
-                </a:lnTo>
-                <a:lnTo>
-                  <a:pt x="839502" y="413667"/>
-                </a:lnTo>
-                <a:lnTo>
-                  <a:pt x="940384" y="531767"/>
-                </a:lnTo>
-                <a:lnTo>
-                  <a:pt x="1038225" y="653696"/>
-                </a:lnTo>
-                <a:lnTo>
-                  <a:pt x="1136066" y="775626"/>
-                </a:lnTo>
-                <a:lnTo>
-                  <a:pt x="1236948" y="893726"/>
-                </a:lnTo>
-                <a:lnTo>
-                  <a:pt x="1343913" y="1004165"/>
-                </a:lnTo>
-                <a:lnTo>
-                  <a:pt x="1460004" y="1103113"/>
-                </a:lnTo>
-                <a:lnTo>
-                  <a:pt x="1588261" y="1186740"/>
-                </a:lnTo>
-                <a:lnTo>
-                  <a:pt x="1731727" y="1251216"/>
-                </a:lnTo>
-                <a:lnTo>
-                  <a:pt x="1893443" y="1292710"/>
-                </a:lnTo>
-                <a:lnTo>
-                  <a:pt x="2076450" y="1307393"/>
-                </a:lnTo>
-                <a:lnTo>
-                  <a:pt x="2076450" y="1320266"/>
-                </a:lnTo>
-                <a:lnTo>
-                  <a:pt x="1893443" y="1305583"/>
-                </a:lnTo>
-                <a:lnTo>
-                  <a:pt x="1731727" y="1264089"/>
-                </a:lnTo>
-                <a:lnTo>
-                  <a:pt x="1588261" y="1199613"/>
-                </a:lnTo>
-                <a:lnTo>
-                  <a:pt x="1460004" y="1115986"/>
-                </a:lnTo>
-                <a:lnTo>
-                  <a:pt x="1343913" y="1017038"/>
-                </a:lnTo>
-                <a:lnTo>
-                  <a:pt x="1236948" y="906599"/>
-                </a:lnTo>
-                <a:lnTo>
-                  <a:pt x="1136066" y="788499"/>
-                </a:lnTo>
-                <a:lnTo>
-                  <a:pt x="1038225" y="666570"/>
-                </a:lnTo>
-                <a:lnTo>
-                  <a:pt x="940384" y="544640"/>
-                </a:lnTo>
-                <a:lnTo>
-                  <a:pt x="839502" y="426540"/>
-                </a:lnTo>
-                <a:lnTo>
-                  <a:pt x="732537" y="316101"/>
-                </a:lnTo>
-                <a:lnTo>
-                  <a:pt x="616446" y="217153"/>
-                </a:lnTo>
-                <a:lnTo>
-                  <a:pt x="488189" y="133526"/>
-                </a:lnTo>
-                <a:lnTo>
-                  <a:pt x="344723" y="69050"/>
-                </a:lnTo>
-                <a:lnTo>
-                  <a:pt x="183007" y="27556"/>
-                </a:lnTo>
-                <a:lnTo>
-                  <a:pt x="0" y="12873"/>
+                  <a:pt x="180216" y="14459"/>
+                </a:lnTo>
+                <a:lnTo>
+                  <a:pt x="339465" y="55320"/>
+                </a:lnTo>
+                <a:lnTo>
+                  <a:pt x="480742" y="118813"/>
+                </a:lnTo>
+                <a:lnTo>
+                  <a:pt x="607043" y="201164"/>
+                </a:lnTo>
+                <a:lnTo>
+                  <a:pt x="721363" y="298603"/>
+                </a:lnTo>
+                <a:lnTo>
+                  <a:pt x="826697" y="407358"/>
+                </a:lnTo>
+                <a:lnTo>
+                  <a:pt x="926040" y="523656"/>
+                </a:lnTo>
+                <a:lnTo>
+                  <a:pt x="1022388" y="643726"/>
+                </a:lnTo>
+                <a:lnTo>
+                  <a:pt x="1118736" y="763796"/>
+                </a:lnTo>
+                <a:lnTo>
+                  <a:pt x="1218080" y="880094"/>
+                </a:lnTo>
+                <a:lnTo>
+                  <a:pt x="1323414" y="988848"/>
+                </a:lnTo>
+                <a:lnTo>
+                  <a:pt x="1437734" y="1086287"/>
+                </a:lnTo>
+                <a:lnTo>
+                  <a:pt x="1564034" y="1168638"/>
+                </a:lnTo>
+                <a:lnTo>
+                  <a:pt x="1705312" y="1232131"/>
+                </a:lnTo>
+                <a:lnTo>
+                  <a:pt x="1864561" y="1272992"/>
+                </a:lnTo>
+                <a:lnTo>
+                  <a:pt x="2044777" y="1287451"/>
+                </a:lnTo>
+                <a:lnTo>
+                  <a:pt x="2044777" y="1300128"/>
+                </a:lnTo>
+                <a:lnTo>
+                  <a:pt x="1864561" y="1285669"/>
+                </a:lnTo>
+                <a:lnTo>
+                  <a:pt x="1705312" y="1244808"/>
+                </a:lnTo>
+                <a:lnTo>
+                  <a:pt x="1564034" y="1181315"/>
+                </a:lnTo>
+                <a:lnTo>
+                  <a:pt x="1437734" y="1098964"/>
+                </a:lnTo>
+                <a:lnTo>
+                  <a:pt x="1323414" y="1001525"/>
+                </a:lnTo>
+                <a:lnTo>
+                  <a:pt x="1218080" y="892770"/>
+                </a:lnTo>
+                <a:lnTo>
+                  <a:pt x="1118736" y="776472"/>
+                </a:lnTo>
+                <a:lnTo>
+                  <a:pt x="1022388" y="656402"/>
+                </a:lnTo>
+                <a:lnTo>
+                  <a:pt x="926040" y="536333"/>
+                </a:lnTo>
+                <a:lnTo>
+                  <a:pt x="826697" y="420034"/>
+                </a:lnTo>
+                <a:lnTo>
+                  <a:pt x="721363" y="311280"/>
+                </a:lnTo>
+                <a:lnTo>
+                  <a:pt x="607043" y="213841"/>
+                </a:lnTo>
+                <a:lnTo>
+                  <a:pt x="480742" y="131490"/>
+                </a:lnTo>
+                <a:lnTo>
+                  <a:pt x="339465" y="67997"/>
+                </a:lnTo>
+                <a:lnTo>
+                  <a:pt x="180216" y="27136"/>
+                </a:lnTo>
+                <a:lnTo>
+                  <a:pt x="0" y="12677"/>
                 </a:lnTo>
                 <a:close/>
               </a:path>
@@ -1362,7 +1362,7 @@
               <a:alpha val="45000"/>
             </a:srgbClr>
           </a:solidFill>
-          <a:ln w="4974">
+          <a:ln w="3175">
             <a:solidFill>
               <a:srgbClr val="70AD47"/>
             </a:solidFill>
@@ -1377,8 +1377,8 @@
         </p:nvSpPr>
         <p:spPr>
           <a:xfrm>
-            <a:off x="1007428" y="4508951"/>
-            <a:ext cx="3253105" cy="767888"/>
+            <a:off x="776110" y="4213954"/>
+            <a:ext cx="2044777" cy="482665"/>
           </a:xfrm>
           <a:custGeom>
             <a:avLst/>
@@ -1387,108 +1387,108 @@
             <a:cxnLst/>
             <a:rect l="0" t="0" r="0" b="0"/>
             <a:pathLst>
-              <a:path w="2076450" h="490141">
+              <a:path w="2044777" h="482665">
                 <a:moveTo>
                   <a:pt x="0" y="0"/>
                 </a:moveTo>
                 <a:lnTo>
-                  <a:pt x="183007" y="4665"/>
-                </a:lnTo>
-                <a:lnTo>
-                  <a:pt x="344723" y="17851"/>
-                </a:lnTo>
-                <a:lnTo>
-                  <a:pt x="488189" y="38338"/>
-                </a:lnTo>
-                <a:lnTo>
-                  <a:pt x="616446" y="64912"/>
-                </a:lnTo>
-                <a:lnTo>
-                  <a:pt x="732537" y="96354"/>
-                </a:lnTo>
-                <a:lnTo>
-                  <a:pt x="839502" y="131447"/>
-                </a:lnTo>
-                <a:lnTo>
-                  <a:pt x="940384" y="168974"/>
-                </a:lnTo>
-                <a:lnTo>
-                  <a:pt x="1038225" y="207719"/>
-                </a:lnTo>
-                <a:lnTo>
-                  <a:pt x="1136066" y="246463"/>
-                </a:lnTo>
-                <a:lnTo>
-                  <a:pt x="1236948" y="283991"/>
-                </a:lnTo>
-                <a:lnTo>
-                  <a:pt x="1343913" y="319084"/>
-                </a:lnTo>
-                <a:lnTo>
-                  <a:pt x="1460004" y="350526"/>
-                </a:lnTo>
-                <a:lnTo>
-                  <a:pt x="1588261" y="377099"/>
-                </a:lnTo>
-                <a:lnTo>
-                  <a:pt x="1731727" y="397587"/>
-                </a:lnTo>
-                <a:lnTo>
-                  <a:pt x="1893443" y="410772"/>
-                </a:lnTo>
-                <a:lnTo>
-                  <a:pt x="2076450" y="415438"/>
-                </a:lnTo>
-                <a:lnTo>
-                  <a:pt x="2076450" y="490141"/>
-                </a:lnTo>
-                <a:lnTo>
-                  <a:pt x="1893443" y="485475"/>
-                </a:lnTo>
-                <a:lnTo>
-                  <a:pt x="1731727" y="472290"/>
-                </a:lnTo>
-                <a:lnTo>
-                  <a:pt x="1588261" y="451802"/>
-                </a:lnTo>
-                <a:lnTo>
-                  <a:pt x="1460004" y="425229"/>
-                </a:lnTo>
-                <a:lnTo>
-                  <a:pt x="1343913" y="393787"/>
-                </a:lnTo>
-                <a:lnTo>
-                  <a:pt x="1236948" y="358693"/>
-                </a:lnTo>
-                <a:lnTo>
-                  <a:pt x="1136066" y="321166"/>
-                </a:lnTo>
-                <a:lnTo>
-                  <a:pt x="1038225" y="282422"/>
-                </a:lnTo>
-                <a:lnTo>
-                  <a:pt x="940384" y="243677"/>
-                </a:lnTo>
-                <a:lnTo>
-                  <a:pt x="839502" y="206150"/>
-                </a:lnTo>
-                <a:lnTo>
-                  <a:pt x="732537" y="171057"/>
-                </a:lnTo>
-                <a:lnTo>
-                  <a:pt x="616446" y="139615"/>
-                </a:lnTo>
-                <a:lnTo>
-                  <a:pt x="488189" y="113041"/>
-                </a:lnTo>
-                <a:lnTo>
-                  <a:pt x="344723" y="92553"/>
-                </a:lnTo>
-                <a:lnTo>
-                  <a:pt x="183007" y="79368"/>
-                </a:lnTo>
-                <a:lnTo>
-                  <a:pt x="0" y="74702"/>
+                  <a:pt x="180216" y="4595"/>
+                </a:lnTo>
+                <a:lnTo>
+                  <a:pt x="339465" y="17579"/>
+                </a:lnTo>
+                <a:lnTo>
+                  <a:pt x="480743" y="37754"/>
+                </a:lnTo>
+                <a:lnTo>
+                  <a:pt x="607043" y="63922"/>
+                </a:lnTo>
+                <a:lnTo>
+                  <a:pt x="721363" y="94885"/>
+                </a:lnTo>
+                <a:lnTo>
+                  <a:pt x="826697" y="129443"/>
+                </a:lnTo>
+                <a:lnTo>
+                  <a:pt x="926041" y="166398"/>
+                </a:lnTo>
+                <a:lnTo>
+                  <a:pt x="1022389" y="204551"/>
+                </a:lnTo>
+                <a:lnTo>
+                  <a:pt x="1118737" y="242705"/>
+                </a:lnTo>
+                <a:lnTo>
+                  <a:pt x="1218080" y="279660"/>
+                </a:lnTo>
+                <a:lnTo>
+                  <a:pt x="1323414" y="314218"/>
+                </a:lnTo>
+                <a:lnTo>
+                  <a:pt x="1437734" y="345180"/>
+                </a:lnTo>
+                <a:lnTo>
+                  <a:pt x="1564035" y="371348"/>
+                </a:lnTo>
+                <a:lnTo>
+                  <a:pt x="1705312" y="391523"/>
+                </a:lnTo>
+                <a:lnTo>
+                  <a:pt x="1864561" y="404507"/>
+                </a:lnTo>
+                <a:lnTo>
+                  <a:pt x="2044777" y="409102"/>
+                </a:lnTo>
+                <a:lnTo>
+                  <a:pt x="2044777" y="482665"/>
+                </a:lnTo>
+                <a:lnTo>
+                  <a:pt x="1864561" y="478071"/>
+                </a:lnTo>
+                <a:lnTo>
+                  <a:pt x="1705312" y="465087"/>
+                </a:lnTo>
+                <a:lnTo>
+                  <a:pt x="1564035" y="444911"/>
+                </a:lnTo>
+                <a:lnTo>
+                  <a:pt x="1437734" y="418743"/>
+                </a:lnTo>
+                <a:lnTo>
+                  <a:pt x="1323414" y="387781"/>
+                </a:lnTo>
+                <a:lnTo>
+                  <a:pt x="1218080" y="353223"/>
+                </a:lnTo>
+                <a:lnTo>
+                  <a:pt x="1118737" y="316268"/>
+                </a:lnTo>
+                <a:lnTo>
+                  <a:pt x="1022389" y="278114"/>
+                </a:lnTo>
+                <a:lnTo>
+                  <a:pt x="926041" y="239961"/>
+                </a:lnTo>
+                <a:lnTo>
+                  <a:pt x="826697" y="203006"/>
+                </a:lnTo>
+                <a:lnTo>
+                  <a:pt x="721363" y="168448"/>
+                </a:lnTo>
+                <a:lnTo>
+                  <a:pt x="607043" y="137486"/>
+                </a:lnTo>
+                <a:lnTo>
+                  <a:pt x="480743" y="111318"/>
+                </a:lnTo>
+                <a:lnTo>
+                  <a:pt x="339465" y="91142"/>
+                </a:lnTo>
+                <a:lnTo>
+                  <a:pt x="180216" y="78158"/>
+                </a:lnTo>
+                <a:lnTo>
+                  <a:pt x="0" y="73564"/>
                 </a:lnTo>
                 <a:close/>
               </a:path>
@@ -1499,7 +1499,7 @@
               <a:alpha val="45000"/>
             </a:srgbClr>
           </a:solidFill>
-          <a:ln w="4974">
+          <a:ln w="3175">
             <a:solidFill>
               <a:srgbClr val="C00000"/>
             </a:solidFill>
@@ -1514,8 +1514,8 @@
         </p:nvSpPr>
         <p:spPr>
           <a:xfrm>
-            <a:off x="798513" y="2803516"/>
-            <a:ext cx="208915" cy="1257761"/>
+            <a:off x="644794" y="3141983"/>
+            <a:ext cx="131316" cy="790580"/>
           </a:xfrm>
           <a:prstGeom prst="rect">
             <a:avLst/>
@@ -1536,8 +1536,8 @@
         </p:nvSpPr>
         <p:spPr>
           <a:xfrm>
-            <a:off x="4260533" y="1507641"/>
-            <a:ext cx="208915" cy="3204488"/>
+            <a:off x="2820887" y="2327446"/>
+            <a:ext cx="131316" cy="2014218"/>
           </a:xfrm>
           <a:prstGeom prst="rect">
             <a:avLst/>
@@ -1558,8 +1558,8 @@
         </p:nvSpPr>
         <p:spPr>
           <a:xfrm>
-            <a:off x="7722553" y="1327150"/>
-            <a:ext cx="208915" cy="20168"/>
+            <a:off x="4996981" y="2213996"/>
+            <a:ext cx="131316" cy="12677"/>
           </a:xfrm>
           <a:prstGeom prst="rect">
             <a:avLst/>
@@ -1580,8 +1580,8 @@
         </p:nvSpPr>
         <p:spPr>
           <a:xfrm>
-            <a:off x="7722553" y="1794993"/>
-            <a:ext cx="208915" cy="1032930"/>
+            <a:off x="4996981" y="2508064"/>
+            <a:ext cx="131316" cy="649260"/>
           </a:xfrm>
           <a:prstGeom prst="rect">
             <a:avLst/>
@@ -1602,8 +1602,8 @@
         </p:nvSpPr>
         <p:spPr>
           <a:xfrm>
-            <a:off x="7722553" y="3275598"/>
-            <a:ext cx="208915" cy="2826752"/>
+            <a:off x="4996981" y="3438715"/>
+            <a:ext cx="131316" cy="1776789"/>
           </a:xfrm>
           <a:prstGeom prst="rect">
             <a:avLst/>
@@ -1624,8 +1624,8 @@
         </p:nvSpPr>
         <p:spPr>
           <a:xfrm>
-            <a:off x="11184573" y="2826884"/>
-            <a:ext cx="208915" cy="100840"/>
+            <a:off x="7173074" y="3156672"/>
+            <a:ext cx="131316" cy="63384"/>
           </a:xfrm>
           <a:prstGeom prst="rect">
             <a:avLst/>
@@ -1646,8 +1646,8 @@
         </p:nvSpPr>
         <p:spPr>
           <a:xfrm>
-            <a:off x="798513" y="4508951"/>
-            <a:ext cx="208915" cy="117035"/>
+            <a:off x="644794" y="4213954"/>
+            <a:ext cx="131316" cy="73563"/>
           </a:xfrm>
           <a:prstGeom prst="rect">
             <a:avLst/>
@@ -1668,8 +1668,8 @@
         </p:nvSpPr>
         <p:spPr>
           <a:xfrm>
-            <a:off x="4260533" y="5159804"/>
-            <a:ext cx="208915" cy="762055"/>
+            <a:off x="2820887" y="4623056"/>
+            <a:ext cx="131316" cy="478998"/>
           </a:xfrm>
           <a:prstGeom prst="rect">
             <a:avLst/>
@@ -1690,8 +1690,8 @@
         </p:nvSpPr>
         <p:spPr>
           <a:xfrm>
-            <a:off x="11184573" y="3375399"/>
-            <a:ext cx="208915" cy="1227217"/>
+            <a:off x="7173074" y="3501447"/>
+            <a:ext cx="131316" cy="771381"/>
           </a:xfrm>
           <a:prstGeom prst="rect">
             <a:avLst/>
@@ -1712,8 +1712,8 @@
         </p:nvSpPr>
         <p:spPr>
           <a:xfrm>
-            <a:off x="1067118" y="3208558"/>
-            <a:ext cx="2298065" cy="447675"/>
+            <a:off x="813629" y="3396577"/>
+            <a:ext cx="1444476" cy="281391"/>
           </a:xfrm>
           <a:prstGeom prst="rect">
             <a:avLst/>
@@ -1724,7 +1724,7 @@
           </a:ln>
         </p:spPr>
         <p:txBody>
-          <a:bodyPr wrap="none" lIns="29845" tIns="0" rIns="29845" bIns="0" anchor="ctr"/>
+          <a:bodyPr wrap="none" lIns="18759" tIns="0" rIns="18759" bIns="0" anchor="ctr"/>
           <a:lstStyle/>
           <a:p>
             <a:pPr algn="l">
@@ -1736,7 +1736,7 @@
               </a:spcAft>
             </a:pPr>
             <a:r>
-              <a:rPr lang="en-US" sz="1410" dirty="0">
+              <a:rPr lang="en-US" sz="900" dirty="0">
                 <a:solidFill>
                   <a:srgbClr val="000000"/>
                 </a:solidFill>
@@ -1754,7 +1754,7 @@
               </a:spcAft>
             </a:pPr>
             <a:r>
-              <a:rPr lang="en-US" sz="1410" dirty="0">
+              <a:rPr lang="en-US" sz="900" dirty="0">
                 <a:solidFill>
                   <a:srgbClr val="000000"/>
                 </a:solidFill>
@@ -1772,8 +1772,8 @@
         </p:nvSpPr>
         <p:spPr>
           <a:xfrm>
-            <a:off x="4529138" y="2886048"/>
-            <a:ext cx="1701165" cy="447675"/>
+            <a:off x="2989722" y="3193860"/>
+            <a:ext cx="1069287" cy="281391"/>
           </a:xfrm>
           <a:prstGeom prst="rect">
             <a:avLst/>
@@ -1784,7 +1784,7 @@
           </a:ln>
         </p:spPr>
         <p:txBody>
-          <a:bodyPr wrap="none" lIns="29845" tIns="0" rIns="29845" bIns="0" anchor="ctr"/>
+          <a:bodyPr wrap="none" lIns="18759" tIns="0" rIns="18759" bIns="0" anchor="ctr"/>
           <a:lstStyle/>
           <a:p>
             <a:pPr algn="l">
@@ -1796,7 +1796,7 @@
               </a:spcAft>
             </a:pPr>
             <a:r>
-              <a:rPr lang="en-US" sz="1410" dirty="0">
+              <a:rPr lang="en-US" sz="900" dirty="0">
                 <a:solidFill>
                   <a:srgbClr val="000000"/>
                 </a:solidFill>
@@ -1814,7 +1814,7 @@
               </a:spcAft>
             </a:pPr>
             <a:r>
-              <a:rPr lang="en-US" sz="1410" dirty="0">
+              <a:rPr lang="en-US" sz="900" dirty="0">
                 <a:solidFill>
                   <a:srgbClr val="000000"/>
                 </a:solidFill>
@@ -1832,8 +1832,8 @@
         </p:nvSpPr>
         <p:spPr>
           <a:xfrm>
-            <a:off x="6812280" y="1113397"/>
-            <a:ext cx="850583" cy="447675"/>
+            <a:off x="4424818" y="2079639"/>
+            <a:ext cx="534644" cy="281391"/>
           </a:xfrm>
           <a:prstGeom prst="rect">
             <a:avLst/>
@@ -1844,7 +1844,7 @@
           </a:ln>
         </p:spPr>
         <p:txBody>
-          <a:bodyPr wrap="none" lIns="29845" tIns="0" rIns="29845" bIns="0" anchor="ctr"/>
+          <a:bodyPr wrap="none" lIns="18759" tIns="0" rIns="18759" bIns="0" anchor="ctr"/>
           <a:lstStyle/>
           <a:p>
             <a:pPr algn="r">
@@ -1856,7 +1856,7 @@
               </a:spcAft>
             </a:pPr>
             <a:r>
-              <a:rPr lang="en-US" sz="1410" dirty="0">
+              <a:rPr lang="en-US" sz="900" dirty="0">
                 <a:solidFill>
                   <a:srgbClr val="000000"/>
                 </a:solidFill>
@@ -1874,7 +1874,7 @@
               </a:spcAft>
             </a:pPr>
             <a:r>
-              <a:rPr lang="en-US" sz="1410" dirty="0">
+              <a:rPr lang="en-US" sz="900" dirty="0">
                 <a:solidFill>
                   <a:srgbClr val="000000"/>
                 </a:solidFill>
@@ -1892,8 +1892,8 @@
         </p:nvSpPr>
         <p:spPr>
           <a:xfrm>
-            <a:off x="6857048" y="2087619"/>
-            <a:ext cx="805815" cy="447675"/>
+            <a:off x="4452957" y="2691999"/>
+            <a:ext cx="506504" cy="281391"/>
           </a:xfrm>
           <a:prstGeom prst="rect">
             <a:avLst/>
@@ -1904,7 +1904,7 @@
           </a:ln>
         </p:spPr>
         <p:txBody>
-          <a:bodyPr wrap="none" lIns="29845" tIns="0" rIns="29845" bIns="0" anchor="ctr"/>
+          <a:bodyPr wrap="none" lIns="18759" tIns="0" rIns="18759" bIns="0" anchor="ctr"/>
           <a:lstStyle/>
           <a:p>
             <a:pPr algn="r">
@@ -1916,7 +1916,7 @@
               </a:spcAft>
             </a:pPr>
             <a:r>
-              <a:rPr lang="en-US" sz="1410" dirty="0">
+              <a:rPr lang="en-US" sz="900" dirty="0">
                 <a:solidFill>
                   <a:srgbClr val="000000"/>
                 </a:solidFill>
@@ -1934,7 +1934,7 @@
               </a:spcAft>
             </a:pPr>
             <a:r>
-              <a:rPr lang="en-US" sz="1410" dirty="0">
+              <a:rPr lang="en-US" sz="900" dirty="0">
                 <a:solidFill>
                   <a:srgbClr val="000000"/>
                 </a:solidFill>
@@ -1952,8 +1952,8 @@
         </p:nvSpPr>
         <p:spPr>
           <a:xfrm>
-            <a:off x="6857048" y="4465136"/>
-            <a:ext cx="805815" cy="447675"/>
+            <a:off x="4452957" y="4186414"/>
+            <a:ext cx="506504" cy="281391"/>
           </a:xfrm>
           <a:prstGeom prst="rect">
             <a:avLst/>
@@ -1964,7 +1964,7 @@
           </a:ln>
         </p:spPr>
         <p:txBody>
-          <a:bodyPr wrap="none" lIns="29845" tIns="0" rIns="29845" bIns="0" anchor="ctr"/>
+          <a:bodyPr wrap="none" lIns="18759" tIns="0" rIns="18759" bIns="0" anchor="ctr"/>
           <a:lstStyle/>
           <a:p>
             <a:pPr algn="r">
@@ -1976,7 +1976,7 @@
               </a:spcAft>
             </a:pPr>
             <a:r>
-              <a:rPr lang="en-US" sz="1410" dirty="0">
+              <a:rPr lang="en-US" sz="900" dirty="0">
                 <a:solidFill>
                   <a:srgbClr val="000000"/>
                 </a:solidFill>
@@ -1994,7 +1994,7 @@
               </a:spcAft>
             </a:pPr>
             <a:r>
-              <a:rPr lang="en-US" sz="1410" dirty="0">
+              <a:rPr lang="en-US" sz="900" dirty="0">
                 <a:solidFill>
                   <a:srgbClr val="000000"/>
                 </a:solidFill>
@@ -2012,8 +2012,8 @@
         </p:nvSpPr>
         <p:spPr>
           <a:xfrm>
-            <a:off x="10274300" y="2653467"/>
-            <a:ext cx="850583" cy="447675"/>
+            <a:off x="6600911" y="3047668"/>
+            <a:ext cx="534644" cy="281391"/>
           </a:xfrm>
           <a:prstGeom prst="rect">
             <a:avLst/>
@@ -2024,7 +2024,7 @@
           </a:ln>
         </p:spPr>
         <p:txBody>
-          <a:bodyPr wrap="none" lIns="29845" tIns="0" rIns="29845" bIns="0" anchor="ctr"/>
+          <a:bodyPr wrap="none" lIns="18759" tIns="0" rIns="18759" bIns="0" anchor="ctr"/>
           <a:lstStyle/>
           <a:p>
             <a:pPr algn="r">
@@ -2036,7 +2036,7 @@
               </a:spcAft>
             </a:pPr>
             <a:r>
-              <a:rPr lang="en-US" sz="1410" dirty="0">
+              <a:rPr lang="en-US" sz="900" dirty="0">
                 <a:solidFill>
                   <a:srgbClr val="000000"/>
                 </a:solidFill>
@@ -2054,7 +2054,7 @@
               </a:spcAft>
             </a:pPr>
             <a:r>
-              <a:rPr lang="en-US" sz="1410" dirty="0">
+              <a:rPr lang="en-US" sz="900" dirty="0">
                 <a:solidFill>
                   <a:srgbClr val="000000"/>
                 </a:solidFill>
@@ -2072,8 +2072,8 @@
         </p:nvSpPr>
         <p:spPr>
           <a:xfrm>
-            <a:off x="1067118" y="4343630"/>
-            <a:ext cx="1432560" cy="447675"/>
+            <a:off x="813629" y="4110040"/>
+            <a:ext cx="900452" cy="281391"/>
           </a:xfrm>
           <a:prstGeom prst="rect">
             <a:avLst/>
@@ -2084,7 +2084,7 @@
           </a:ln>
         </p:spPr>
         <p:txBody>
-          <a:bodyPr wrap="none" lIns="29845" tIns="0" rIns="29845" bIns="0" anchor="ctr"/>
+          <a:bodyPr wrap="none" lIns="18759" tIns="0" rIns="18759" bIns="0" anchor="ctr"/>
           <a:lstStyle/>
           <a:p>
             <a:pPr algn="l">
@@ -2096,7 +2096,7 @@
               </a:spcAft>
             </a:pPr>
             <a:r>
-              <a:rPr lang="en-US" sz="1410" dirty="0">
+              <a:rPr lang="en-US" sz="900" dirty="0">
                 <a:solidFill>
                   <a:srgbClr val="000000"/>
                 </a:solidFill>
@@ -2114,7 +2114,7 @@
               </a:spcAft>
             </a:pPr>
             <a:r>
-              <a:rPr lang="en-US" sz="1410" dirty="0">
+              <a:rPr lang="en-US" sz="900" dirty="0">
                 <a:solidFill>
                   <a:srgbClr val="000000"/>
                 </a:solidFill>
@@ -2132,8 +2132,8 @@
         </p:nvSpPr>
         <p:spPr>
           <a:xfrm>
-            <a:off x="4529138" y="5316994"/>
-            <a:ext cx="716280" cy="447675"/>
+            <a:off x="2989722" y="4721859"/>
+            <a:ext cx="450226" cy="281391"/>
           </a:xfrm>
           <a:prstGeom prst="rect">
             <a:avLst/>
@@ -2144,7 +2144,7 @@
           </a:ln>
         </p:spPr>
         <p:txBody>
-          <a:bodyPr wrap="none" lIns="29845" tIns="0" rIns="29845" bIns="0" anchor="ctr"/>
+          <a:bodyPr wrap="none" lIns="18759" tIns="0" rIns="18759" bIns="0" anchor="ctr"/>
           <a:lstStyle/>
           <a:p>
             <a:pPr algn="l">
@@ -2156,7 +2156,7 @@
               </a:spcAft>
             </a:pPr>
             <a:r>
-              <a:rPr lang="en-US" sz="1410" dirty="0">
+              <a:rPr lang="en-US" sz="900" dirty="0">
                 <a:solidFill>
                   <a:srgbClr val="000000"/>
                 </a:solidFill>
@@ -2174,7 +2174,7 @@
               </a:spcAft>
             </a:pPr>
             <a:r>
-              <a:rPr lang="en-US" sz="1410" dirty="0">
+              <a:rPr lang="en-US" sz="900" dirty="0">
                 <a:solidFill>
                   <a:srgbClr val="000000"/>
                 </a:solidFill>
@@ -2192,8 +2192,8 @@
         </p:nvSpPr>
         <p:spPr>
           <a:xfrm>
-            <a:off x="10169843" y="3765170"/>
-            <a:ext cx="955040" cy="447675"/>
+            <a:off x="6535253" y="3746442"/>
+            <a:ext cx="600302" cy="281391"/>
           </a:xfrm>
           <a:prstGeom prst="rect">
             <a:avLst/>
@@ -2204,7 +2204,7 @@
           </a:ln>
         </p:spPr>
         <p:txBody>
-          <a:bodyPr wrap="none" lIns="29845" tIns="0" rIns="29845" bIns="0" anchor="ctr"/>
+          <a:bodyPr wrap="none" lIns="18759" tIns="0" rIns="18759" bIns="0" anchor="ctr"/>
           <a:lstStyle/>
           <a:p>
             <a:pPr algn="r">
@@ -2216,7 +2216,7 @@
               </a:spcAft>
             </a:pPr>
             <a:r>
-              <a:rPr lang="en-US" sz="1410" dirty="0">
+              <a:rPr lang="en-US" sz="900" dirty="0">
                 <a:solidFill>
                   <a:srgbClr val="000000"/>
                 </a:solidFill>
@@ -2234,12 +2234,188 @@
               </a:spcAft>
             </a:pPr>
             <a:r>
-              <a:rPr lang="en-US" sz="1410" dirty="0">
+              <a:rPr lang="en-US" sz="900" dirty="0">
                 <a:solidFill>
                   <a:srgbClr val="000000"/>
                 </a:solidFill>
               </a:rPr>
               <a:t>121.7</a:t>
+            </a:r>
+          </a:p>
+        </p:txBody>
+      </p:sp>
+      <p:sp>
+        <p:nvSpPr>
+          <p:cNvPr id="4" name="Mermaid source"/>
+          <p:cNvSpPr/>
+          <p:nvPr/>
+        </p:nvSpPr>
+        <p:spPr>
+          <a:xfrm>
+            <a:off x="7674864" y="1028700"/>
+            <a:ext cx="4059936" cy="5372100"/>
+          </a:xfrm>
+          <a:prstGeom prst="rect">
+            <a:avLst/>
+          </a:prstGeom>
+          <a:solidFill>
+            <a:srgbClr val="F3F4F6"/>
+          </a:solidFill>
+          <a:ln w="9525">
+            <a:solidFill>
+              <a:srgbClr val="D1D5DB"/>
+            </a:solidFill>
+          </a:ln>
+        </p:spPr>
+        <p:txBody>
+          <a:bodyPr wrap="square" lIns="91440" tIns="45720" rIns="91440" bIns="45720" anchor="t">
+            <a:noAutofit/>
+          </a:bodyPr>
+          <a:lstStyle/>
+          <a:p>
+            <a:pPr algn="l"/>
+            <a:r>
+              <a:rPr lang="en-US" sz="1400" dirty="0">
+                <a:solidFill>
+                  <a:srgbClr val="1F2937"/>
+                </a:solidFill>
+                <a:latin typeface="Consolas"/>
+                <a:cs typeface="Consolas"/>
+              </a:rPr>
+              <a:t>sankey-beta</a:t>
+            </a:r>
+          </a:p>
+          <a:p>
+            <a:endParaRPr lang="en-US" sz="1400" dirty="0"/>
+          </a:p>
+          <a:p>
+            <a:pPr algn="l"/>
+            <a:r>
+              <a:rPr lang="en-US" sz="1400" dirty="0">
+                <a:solidFill>
+                  <a:srgbClr val="1F2937"/>
+                </a:solidFill>
+                <a:latin typeface="Consolas"/>
+                <a:cs typeface="Consolas"/>
+              </a:rPr>
+              <a:t>Agricultural 'waste',Bio-conversion,124.729</a:t>
+            </a:r>
+          </a:p>
+          <a:p>
+            <a:pPr algn="l"/>
+            <a:r>
+              <a:rPr lang="en-US" sz="1400" dirty="0">
+                <a:solidFill>
+                  <a:srgbClr val="1F2937"/>
+                </a:solidFill>
+                <a:latin typeface="Consolas"/>
+                <a:cs typeface="Consolas"/>
+              </a:rPr>
+              <a:t>Bio-conversion,Liquid,0.597</a:t>
+            </a:r>
+          </a:p>
+          <a:p>
+            <a:pPr algn="l"/>
+            <a:r>
+              <a:rPr lang="en-US" sz="1400" dirty="0">
+                <a:solidFill>
+                  <a:srgbClr val="1F2937"/>
+                </a:solidFill>
+                <a:latin typeface="Consolas"/>
+                <a:cs typeface="Consolas"/>
+              </a:rPr>
+              <a:t>Bio-conversion,Solid,26.862</a:t>
+            </a:r>
+          </a:p>
+          <a:p>
+            <a:pPr algn="l"/>
+            <a:r>
+              <a:rPr lang="en-US" sz="1400" dirty="0">
+                <a:solidFill>
+                  <a:srgbClr val="1F2937"/>
+                </a:solidFill>
+                <a:latin typeface="Consolas"/>
+                <a:cs typeface="Consolas"/>
+              </a:rPr>
+              <a:t>Bio-conversion,Gas,280.322</a:t>
+            </a:r>
+          </a:p>
+          <a:p>
+            <a:pPr algn="l"/>
+            <a:r>
+              <a:rPr lang="en-US" sz="1400" dirty="0">
+                <a:solidFill>
+                  <a:srgbClr val="1F2937"/>
+                </a:solidFill>
+                <a:latin typeface="Consolas"/>
+                <a:cs typeface="Consolas"/>
+              </a:rPr>
+              <a:t>Bio-conversion,Losses,10</a:t>
+            </a:r>
+          </a:p>
+          <a:p>
+            <a:pPr algn="l"/>
+            <a:r>
+              <a:rPr lang="en-US" sz="1400" dirty="0">
+                <a:solidFill>
+                  <a:srgbClr val="1F2937"/>
+                </a:solidFill>
+                <a:latin typeface="Consolas"/>
+                <a:cs typeface="Consolas"/>
+              </a:rPr>
+              <a:t>Coal imports,Coal,11.606</a:t>
+            </a:r>
+          </a:p>
+          <a:p>
+            <a:pPr algn="l"/>
+            <a:r>
+              <a:rPr lang="en-US" sz="1400" dirty="0">
+                <a:solidFill>
+                  <a:srgbClr val="1F2937"/>
+                </a:solidFill>
+                <a:latin typeface="Consolas"/>
+                <a:cs typeface="Consolas"/>
+              </a:rPr>
+              <a:t>Coal,Solid,75.571</a:t>
+            </a:r>
+          </a:p>
+          <a:p>
+            <a:pPr algn="l"/>
+            <a:r>
+              <a:rPr lang="en-US" sz="1400" dirty="0">
+                <a:solidFill>
+                  <a:srgbClr val="1F2937"/>
+                </a:solidFill>
+                <a:latin typeface="Consolas"/>
+                <a:cs typeface="Consolas"/>
+              </a:rPr>
+              <a:t>Gas,Heating,79.5</a:t>
+            </a:r>
+          </a:p>
+          <a:p>
+            <a:pPr algn="l"/>
+            <a:r>
+              <a:rPr lang="en-US" sz="1400" dirty="0">
+                <a:solidFill>
+                  <a:srgbClr val="1F2937"/>
+                </a:solidFill>
+                <a:latin typeface="Consolas"/>
+                <a:cs typeface="Consolas"/>
+              </a:rPr>
+              <a:t>Solid,Heating,40.2</a:t>
+            </a:r>
+          </a:p>
+          <a:p>
+            <a:pPr algn="l"/>
+            <a:r>
+              <a:rPr lang="en-US" sz="1400" dirty="0">
+                <a:solidFill>
+                  <a:srgbClr val="1F2937"/>
+                </a:solidFill>
+                <a:latin typeface="Consolas"/>
+                <a:cs typeface="Consolas"/>
+              </a:rPr>
+              <a:t>Liquid,Heating,2</a:t>
             </a:r>
           </a:p>
         </p:txBody>
